--- a/2024/2024-04-26-AI-Updates.pptx
+++ b/2024/2024-04-26-AI-Updates.pptx
@@ -976,7 +976,7 @@
   <p:cSld>
     <p:spTree>
       <p:nvGrpSpPr>
-        <p:cNvPr id="1" name="Shape 146"/>
+        <p:cNvPr id="1" name="Shape 147"/>
         <p:cNvGrpSpPr/>
         <p:nvPr/>
       </p:nvGrpSpPr>
@@ -990,7 +990,7 @@
       </p:grpSpPr>
       <p:sp>
         <p:nvSpPr>
-          <p:cNvPr id="147" name="Google Shape;147;g2ce34b99a12_0_1:notes"/>
+          <p:cNvPr id="148" name="Google Shape;148;g2ce34b99a12_0_1:notes"/>
           <p:cNvSpPr>
             <a:spLocks noGrp="1" noRot="1" noChangeAspect="1"/>
           </p:cNvSpPr>
@@ -1041,7 +1041,7 @@
       </p:sp>
       <p:sp>
         <p:nvSpPr>
-          <p:cNvPr id="148" name="Google Shape;148;g2ce34b99a12_0_1:notes"/>
+          <p:cNvPr id="149" name="Google Shape;149;g2ce34b99a12_0_1:notes"/>
           <p:cNvSpPr txBox="1">
             <a:spLocks noGrp="1"/>
           </p:cNvSpPr>
@@ -1098,7 +1098,7 @@
   <p:cSld>
     <p:spTree>
       <p:nvGrpSpPr>
-        <p:cNvPr id="1" name="Shape 160"/>
+        <p:cNvPr id="1" name="Shape 161"/>
         <p:cNvGrpSpPr/>
         <p:nvPr/>
       </p:nvGrpSpPr>
@@ -1112,7 +1112,7 @@
       </p:grpSpPr>
       <p:sp>
         <p:nvSpPr>
-          <p:cNvPr id="161" name="Google Shape;161;g2cec660285c_0_3:notes"/>
+          <p:cNvPr id="162" name="Google Shape;162;g2cec660285c_0_3:notes"/>
           <p:cNvSpPr>
             <a:spLocks noGrp="1" noRot="1" noChangeAspect="1"/>
           </p:cNvSpPr>
@@ -1163,7 +1163,7 @@
       </p:sp>
       <p:sp>
         <p:nvSpPr>
-          <p:cNvPr id="162" name="Google Shape;162;g2cec660285c_0_3:notes"/>
+          <p:cNvPr id="163" name="Google Shape;163;g2cec660285c_0_3:notes"/>
           <p:cNvSpPr txBox="1">
             <a:spLocks noGrp="1"/>
           </p:cNvSpPr>
@@ -1220,7 +1220,7 @@
   <p:cSld>
     <p:spTree>
       <p:nvGrpSpPr>
-        <p:cNvPr id="1" name="Shape 170"/>
+        <p:cNvPr id="1" name="Shape 171"/>
         <p:cNvGrpSpPr/>
         <p:nvPr/>
       </p:nvGrpSpPr>
@@ -1234,7 +1234,7 @@
       </p:grpSpPr>
       <p:sp>
         <p:nvSpPr>
-          <p:cNvPr id="171" name="Google Shape;171;g2cf7b08dbd5_0_17:notes"/>
+          <p:cNvPr id="172" name="Google Shape;172;g2cf7b08dbd5_0_17:notes"/>
           <p:cNvSpPr>
             <a:spLocks noGrp="1" noRot="1" noChangeAspect="1"/>
           </p:cNvSpPr>
@@ -1285,7 +1285,7 @@
       </p:sp>
       <p:sp>
         <p:nvSpPr>
-          <p:cNvPr id="172" name="Google Shape;172;g2cf7b08dbd5_0_17:notes"/>
+          <p:cNvPr id="173" name="Google Shape;173;g2cf7b08dbd5_0_17:notes"/>
           <p:cNvSpPr txBox="1">
             <a:spLocks noGrp="1"/>
           </p:cNvSpPr>
@@ -1342,7 +1342,7 @@
   <p:cSld>
     <p:spTree>
       <p:nvGrpSpPr>
-        <p:cNvPr id="1" name="Shape 179"/>
+        <p:cNvPr id="1" name="Shape 181"/>
         <p:cNvGrpSpPr/>
         <p:nvPr/>
       </p:nvGrpSpPr>
@@ -1356,7 +1356,7 @@
       </p:grpSpPr>
       <p:sp>
         <p:nvSpPr>
-          <p:cNvPr id="180" name="Google Shape;180;g2cfe703bd3c_0_31:notes"/>
+          <p:cNvPr id="182" name="Google Shape;182;g2cfe703bd3c_0_31:notes"/>
           <p:cNvSpPr>
             <a:spLocks noGrp="1" noRot="1" noChangeAspect="1"/>
           </p:cNvSpPr>
@@ -1407,7 +1407,7 @@
       </p:sp>
       <p:sp>
         <p:nvSpPr>
-          <p:cNvPr id="181" name="Google Shape;181;g2cfe703bd3c_0_31:notes"/>
+          <p:cNvPr id="183" name="Google Shape;183;g2cfe703bd3c_0_31:notes"/>
           <p:cNvSpPr txBox="1">
             <a:spLocks noGrp="1"/>
           </p:cNvSpPr>
@@ -1464,7 +1464,7 @@
   <p:cSld>
     <p:spTree>
       <p:nvGrpSpPr>
-        <p:cNvPr id="1" name="Shape 187"/>
+        <p:cNvPr id="1" name="Shape 189"/>
         <p:cNvGrpSpPr/>
         <p:nvPr/>
       </p:nvGrpSpPr>
@@ -1478,7 +1478,7 @@
       </p:grpSpPr>
       <p:sp>
         <p:nvSpPr>
-          <p:cNvPr id="188" name="Google Shape;188;g1f7f7cda57c_1_2:notes"/>
+          <p:cNvPr id="190" name="Google Shape;190;g1f7f7cda57c_1_2:notes"/>
           <p:cNvSpPr>
             <a:spLocks noGrp="1" noRot="1" noChangeAspect="1"/>
           </p:cNvSpPr>
@@ -1529,7 +1529,7 @@
       </p:sp>
       <p:sp>
         <p:nvSpPr>
-          <p:cNvPr id="189" name="Google Shape;189;g1f7f7cda57c_1_2:notes"/>
+          <p:cNvPr id="191" name="Google Shape;191;g1f7f7cda57c_1_2:notes"/>
           <p:cNvSpPr txBox="1">
             <a:spLocks noGrp="1"/>
           </p:cNvSpPr>
@@ -1586,7 +1586,7 @@
   <p:cSld>
     <p:spTree>
       <p:nvGrpSpPr>
-        <p:cNvPr id="1" name="Shape 194"/>
+        <p:cNvPr id="1" name="Shape 196"/>
         <p:cNvGrpSpPr/>
         <p:nvPr/>
       </p:nvGrpSpPr>
@@ -1600,7 +1600,7 @@
       </p:grpSpPr>
       <p:sp>
         <p:nvSpPr>
-          <p:cNvPr id="195" name="Google Shape;195;g2cec660285c_0_18:notes"/>
+          <p:cNvPr id="197" name="Google Shape;197;g2cec660285c_0_18:notes"/>
           <p:cNvSpPr>
             <a:spLocks noGrp="1" noRot="1" noChangeAspect="1"/>
           </p:cNvSpPr>
@@ -1651,7 +1651,7 @@
       </p:sp>
       <p:sp>
         <p:nvSpPr>
-          <p:cNvPr id="196" name="Google Shape;196;g2cec660285c_0_18:notes"/>
+          <p:cNvPr id="198" name="Google Shape;198;g2cec660285c_0_18:notes"/>
           <p:cNvSpPr txBox="1">
             <a:spLocks noGrp="1"/>
           </p:cNvSpPr>
@@ -1708,7 +1708,7 @@
   <p:cSld>
     <p:spTree>
       <p:nvGrpSpPr>
-        <p:cNvPr id="1" name="Shape 203"/>
+        <p:cNvPr id="1" name="Shape 205"/>
         <p:cNvGrpSpPr/>
         <p:nvPr/>
       </p:nvGrpSpPr>
@@ -1722,7 +1722,7 @@
       </p:grpSpPr>
       <p:sp>
         <p:nvSpPr>
-          <p:cNvPr id="204" name="Google Shape;204;p21:notes"/>
+          <p:cNvPr id="206" name="Google Shape;206;p21:notes"/>
           <p:cNvSpPr>
             <a:spLocks noGrp="1" noRot="1" noChangeAspect="1"/>
           </p:cNvSpPr>
@@ -1773,7 +1773,7 @@
       </p:sp>
       <p:sp>
         <p:nvSpPr>
-          <p:cNvPr id="205" name="Google Shape;205;p21:notes"/>
+          <p:cNvPr id="207" name="Google Shape;207;p21:notes"/>
           <p:cNvSpPr txBox="1">
             <a:spLocks noGrp="1"/>
           </p:cNvSpPr>
@@ -1830,7 +1830,7 @@
   <p:cSld>
     <p:spTree>
       <p:nvGrpSpPr>
-        <p:cNvPr id="1" name="Shape 213"/>
+        <p:cNvPr id="1" name="Shape 215"/>
         <p:cNvGrpSpPr/>
         <p:nvPr/>
       </p:nvGrpSpPr>
@@ -1844,7 +1844,7 @@
       </p:grpSpPr>
       <p:sp>
         <p:nvSpPr>
-          <p:cNvPr id="214" name="Google Shape;214;p22:notes"/>
+          <p:cNvPr id="216" name="Google Shape;216;p22:notes"/>
           <p:cNvSpPr>
             <a:spLocks noGrp="1" noRot="1" noChangeAspect="1"/>
           </p:cNvSpPr>
@@ -1895,7 +1895,7 @@
       </p:sp>
       <p:sp>
         <p:nvSpPr>
-          <p:cNvPr id="215" name="Google Shape;215;p22:notes"/>
+          <p:cNvPr id="217" name="Google Shape;217;p22:notes"/>
           <p:cNvSpPr txBox="1">
             <a:spLocks noGrp="1"/>
           </p:cNvSpPr>
@@ -1952,7 +1952,7 @@
   <p:cSld>
     <p:spTree>
       <p:nvGrpSpPr>
-        <p:cNvPr id="1" name="Shape 223"/>
+        <p:cNvPr id="1" name="Shape 225"/>
         <p:cNvGrpSpPr/>
         <p:nvPr/>
       </p:nvGrpSpPr>
@@ -1966,7 +1966,7 @@
       </p:grpSpPr>
       <p:sp>
         <p:nvSpPr>
-          <p:cNvPr id="224" name="Google Shape;224;p23:notes"/>
+          <p:cNvPr id="226" name="Google Shape;226;p23:notes"/>
           <p:cNvSpPr>
             <a:spLocks noGrp="1" noRot="1" noChangeAspect="1"/>
           </p:cNvSpPr>
@@ -2017,7 +2017,7 @@
       </p:sp>
       <p:sp>
         <p:nvSpPr>
-          <p:cNvPr id="225" name="Google Shape;225;p23:notes"/>
+          <p:cNvPr id="227" name="Google Shape;227;p23:notes"/>
           <p:cNvSpPr txBox="1">
             <a:spLocks noGrp="1"/>
           </p:cNvSpPr>
@@ -2318,7 +2318,7 @@
   <p:cSld>
     <p:spTree>
       <p:nvGrpSpPr>
-        <p:cNvPr id="1" name="Shape 81"/>
+        <p:cNvPr id="1" name="Shape 82"/>
         <p:cNvGrpSpPr/>
         <p:nvPr/>
       </p:nvGrpSpPr>
@@ -2332,7 +2332,7 @@
       </p:grpSpPr>
       <p:sp>
         <p:nvSpPr>
-          <p:cNvPr id="82" name="Google Shape;82;p20:notes"/>
+          <p:cNvPr id="83" name="Google Shape;83;p20:notes"/>
           <p:cNvSpPr>
             <a:spLocks noGrp="1" noRot="1" noChangeAspect="1"/>
           </p:cNvSpPr>
@@ -2383,7 +2383,7 @@
       </p:sp>
       <p:sp>
         <p:nvSpPr>
-          <p:cNvPr id="83" name="Google Shape;83;p20:notes"/>
+          <p:cNvPr id="84" name="Google Shape;84;p20:notes"/>
           <p:cNvSpPr txBox="1">
             <a:spLocks noGrp="1"/>
           </p:cNvSpPr>
@@ -2440,7 +2440,7 @@
   <p:cSld>
     <p:spTree>
       <p:nvGrpSpPr>
-        <p:cNvPr id="1" name="Shape 105"/>
+        <p:cNvPr id="1" name="Shape 106"/>
         <p:cNvGrpSpPr/>
         <p:nvPr/>
       </p:nvGrpSpPr>
@@ -2454,7 +2454,7 @@
       </p:grpSpPr>
       <p:sp>
         <p:nvSpPr>
-          <p:cNvPr id="106" name="Google Shape;106;g2cd95e3988b_0_3:notes"/>
+          <p:cNvPr id="107" name="Google Shape;107;g2cd95e3988b_0_3:notes"/>
           <p:cNvSpPr>
             <a:spLocks noGrp="1" noRot="1" noChangeAspect="1"/>
           </p:cNvSpPr>
@@ -2505,7 +2505,7 @@
       </p:sp>
       <p:sp>
         <p:nvSpPr>
-          <p:cNvPr id="107" name="Google Shape;107;g2cd95e3988b_0_3:notes"/>
+          <p:cNvPr id="108" name="Google Shape;108;g2cd95e3988b_0_3:notes"/>
           <p:cNvSpPr txBox="1">
             <a:spLocks noGrp="1"/>
           </p:cNvSpPr>
@@ -2562,7 +2562,7 @@
   <p:cSld>
     <p:spTree>
       <p:nvGrpSpPr>
-        <p:cNvPr id="1" name="Shape 112"/>
+        <p:cNvPr id="1" name="Shape 113"/>
         <p:cNvGrpSpPr/>
         <p:nvPr/>
       </p:nvGrpSpPr>
@@ -2576,7 +2576,7 @@
       </p:grpSpPr>
       <p:sp>
         <p:nvSpPr>
-          <p:cNvPr id="113" name="Google Shape;113;g1f7f7cda57c_1_24:notes"/>
+          <p:cNvPr id="114" name="Google Shape;114;g1f7f7cda57c_1_24:notes"/>
           <p:cNvSpPr>
             <a:spLocks noGrp="1" noRot="1" noChangeAspect="1"/>
           </p:cNvSpPr>
@@ -2627,7 +2627,7 @@
       </p:sp>
       <p:sp>
         <p:nvSpPr>
-          <p:cNvPr id="114" name="Google Shape;114;g1f7f7cda57c_1_24:notes"/>
+          <p:cNvPr id="115" name="Google Shape;115;g1f7f7cda57c_1_24:notes"/>
           <p:cNvSpPr txBox="1">
             <a:spLocks noGrp="1"/>
           </p:cNvSpPr>
@@ -2684,7 +2684,7 @@
   <p:cSld>
     <p:spTree>
       <p:nvGrpSpPr>
-        <p:cNvPr id="1" name="Shape 120"/>
+        <p:cNvPr id="1" name="Shape 121"/>
         <p:cNvGrpSpPr/>
         <p:nvPr/>
       </p:nvGrpSpPr>
@@ -2698,7 +2698,7 @@
       </p:grpSpPr>
       <p:sp>
         <p:nvSpPr>
-          <p:cNvPr id="121" name="Google Shape;121;g1f7f7cda57c_1_15:notes"/>
+          <p:cNvPr id="122" name="Google Shape;122;g1f7f7cda57c_1_15:notes"/>
           <p:cNvSpPr>
             <a:spLocks noGrp="1" noRot="1" noChangeAspect="1"/>
           </p:cNvSpPr>
@@ -2749,7 +2749,7 @@
       </p:sp>
       <p:sp>
         <p:nvSpPr>
-          <p:cNvPr id="122" name="Google Shape;122;g1f7f7cda57c_1_15:notes"/>
+          <p:cNvPr id="123" name="Google Shape;123;g1f7f7cda57c_1_15:notes"/>
           <p:cNvSpPr txBox="1">
             <a:spLocks noGrp="1"/>
           </p:cNvSpPr>
@@ -2806,7 +2806,7 @@
   <p:cSld>
     <p:spTree>
       <p:nvGrpSpPr>
-        <p:cNvPr id="1" name="Shape 130"/>
+        <p:cNvPr id="1" name="Shape 131"/>
         <p:cNvGrpSpPr/>
         <p:nvPr/>
       </p:nvGrpSpPr>
@@ -2820,7 +2820,7 @@
       </p:grpSpPr>
       <p:sp>
         <p:nvSpPr>
-          <p:cNvPr id="131" name="Google Shape;131;g1f7f7cda57c_1_31:notes"/>
+          <p:cNvPr id="132" name="Google Shape;132;g1f7f7cda57c_1_31:notes"/>
           <p:cNvSpPr>
             <a:spLocks noGrp="1" noRot="1" noChangeAspect="1"/>
           </p:cNvSpPr>
@@ -2871,7 +2871,7 @@
       </p:sp>
       <p:sp>
         <p:nvSpPr>
-          <p:cNvPr id="132" name="Google Shape;132;g1f7f7cda57c_1_31:notes"/>
+          <p:cNvPr id="133" name="Google Shape;133;g1f7f7cda57c_1_31:notes"/>
           <p:cNvSpPr txBox="1">
             <a:spLocks noGrp="1"/>
           </p:cNvSpPr>
@@ -2928,7 +2928,7 @@
   <p:cSld>
     <p:spTree>
       <p:nvGrpSpPr>
-        <p:cNvPr id="1" name="Shape 137"/>
+        <p:cNvPr id="1" name="Shape 138"/>
         <p:cNvGrpSpPr/>
         <p:nvPr/>
       </p:nvGrpSpPr>
@@ -2942,7 +2942,7 @@
       </p:grpSpPr>
       <p:sp>
         <p:nvSpPr>
-          <p:cNvPr id="138" name="Google Shape;138;g1f7f7cda57c_0_3:notes"/>
+          <p:cNvPr id="139" name="Google Shape;139;g1f7f7cda57c_0_3:notes"/>
           <p:cNvSpPr>
             <a:spLocks noGrp="1" noRot="1" noChangeAspect="1"/>
           </p:cNvSpPr>
@@ -2993,7 +2993,7 @@
       </p:sp>
       <p:sp>
         <p:nvSpPr>
-          <p:cNvPr id="139" name="Google Shape;139;g1f7f7cda57c_0_3:notes"/>
+          <p:cNvPr id="140" name="Google Shape;140;g1f7f7cda57c_0_3:notes"/>
           <p:cNvSpPr txBox="1">
             <a:spLocks noGrp="1"/>
           </p:cNvSpPr>
@@ -11106,7 +11106,7 @@
         <p:spPr>
           <a:xfrm>
             <a:off x="86325" y="1204025"/>
-            <a:ext cx="4420200" cy="3648000"/>
+            <a:ext cx="4420200" cy="3879000"/>
           </a:xfrm>
           <a:prstGeom prst="rect">
             <a:avLst/>
@@ -11195,6 +11195,46 @@
                 <a:cs typeface="Calibri"/>
                 <a:sym typeface="Calibri"/>
               </a:rPr>
+              <a:t>Llama3-70B on your phone via HuggingChat app:</a:t>
+            </a:r>
+            <a:endParaRPr sz="1500" b="1">
+              <a:solidFill>
+                <a:srgbClr val="3C78D8"/>
+              </a:solidFill>
+              <a:latin typeface="Calibri"/>
+              <a:ea typeface="Calibri"/>
+              <a:cs typeface="Calibri"/>
+              <a:sym typeface="Calibri"/>
+            </a:endParaRPr>
+          </a:p>
+          <a:p>
+            <a:pPr marL="228600" marR="0" lvl="0" indent="-209550" algn="l" rtl="0">
+              <a:lnSpc>
+                <a:spcPct val="100000"/>
+              </a:lnSpc>
+              <a:spcBef>
+                <a:spcPts val="0"/>
+              </a:spcBef>
+              <a:spcAft>
+                <a:spcPts val="0"/>
+              </a:spcAft>
+              <a:buClr>
+                <a:srgbClr val="3C78D8"/>
+              </a:buClr>
+              <a:buSzPts val="1500"/>
+              <a:buFont typeface="Calibri"/>
+              <a:buChar char="●"/>
+            </a:pPr>
+            <a:r>
+              <a:rPr lang="en" sz="1500" b="1">
+                <a:solidFill>
+                  <a:srgbClr val="3C78D8"/>
+                </a:solidFill>
+                <a:latin typeface="Calibri"/>
+                <a:ea typeface="Calibri"/>
+                <a:cs typeface="Calibri"/>
+                <a:sym typeface="Calibri"/>
+              </a:rPr>
               <a:t>Llama3 impersonates humans in group chats</a:t>
             </a:r>
             <a:endParaRPr sz="1500" b="1">
@@ -11698,7 +11738,7 @@
         <p:spPr>
           <a:xfrm>
             <a:off x="4635500" y="1204025"/>
-            <a:ext cx="4420200" cy="2031900"/>
+            <a:ext cx="4420200" cy="2262600"/>
           </a:xfrm>
           <a:prstGeom prst="rect">
             <a:avLst/>
@@ -11868,6 +11908,46 @@
                 <a:sym typeface="Calibri"/>
               </a:rPr>
               <a:t>The Instruction Hierarchy paper</a:t>
+            </a:r>
+            <a:endParaRPr sz="1500" b="1">
+              <a:solidFill>
+                <a:srgbClr val="3C78D8"/>
+              </a:solidFill>
+              <a:latin typeface="Calibri"/>
+              <a:ea typeface="Calibri"/>
+              <a:cs typeface="Calibri"/>
+              <a:sym typeface="Calibri"/>
+            </a:endParaRPr>
+          </a:p>
+          <a:p>
+            <a:pPr marL="228600" marR="0" lvl="0" indent="-209550" algn="l" rtl="0">
+              <a:lnSpc>
+                <a:spcPct val="100000"/>
+              </a:lnSpc>
+              <a:spcBef>
+                <a:spcPts val="0"/>
+              </a:spcBef>
+              <a:spcAft>
+                <a:spcPts val="0"/>
+              </a:spcAft>
+              <a:buClr>
+                <a:srgbClr val="3C78D8"/>
+              </a:buClr>
+              <a:buSzPts val="1500"/>
+              <a:buFont typeface="Calibri"/>
+              <a:buChar char="●"/>
+            </a:pPr>
+            <a:r>
+              <a:rPr lang="en" sz="1500" b="1">
+                <a:solidFill>
+                  <a:srgbClr val="3C78D8"/>
+                </a:solidFill>
+                <a:latin typeface="Calibri"/>
+                <a:ea typeface="Calibri"/>
+                <a:cs typeface="Calibri"/>
+                <a:sym typeface="Calibri"/>
+              </a:rPr>
+              <a:t>Meta to spend up to $40 Bln in 2024 on AI</a:t>
             </a:r>
             <a:endParaRPr sz="1500" b="1">
               <a:solidFill>
@@ -12172,7 +12252,7 @@
   <p:cSld>
     <p:spTree>
       <p:nvGrpSpPr>
-        <p:cNvPr id="1" name="Shape 149"/>
+        <p:cNvPr id="1" name="Shape 150"/>
         <p:cNvGrpSpPr/>
         <p:nvPr/>
       </p:nvGrpSpPr>
@@ -12186,7 +12266,7 @@
       </p:grpSpPr>
       <p:sp>
         <p:nvSpPr>
-          <p:cNvPr id="150" name="Google Shape;150;p23"/>
+          <p:cNvPr id="151" name="Google Shape;151;p23"/>
           <p:cNvSpPr txBox="1"/>
           <p:nvPr/>
         </p:nvSpPr>
@@ -12455,7 +12535,7 @@
       </p:sp>
       <p:sp>
         <p:nvSpPr>
-          <p:cNvPr id="151" name="Google Shape;151;p23"/>
+          <p:cNvPr id="152" name="Google Shape;152;p23"/>
           <p:cNvSpPr txBox="1"/>
           <p:nvPr/>
         </p:nvSpPr>
@@ -12513,7 +12593,7 @@
       </p:sp>
       <p:sp>
         <p:nvSpPr>
-          <p:cNvPr id="152" name="Google Shape;152;p23"/>
+          <p:cNvPr id="153" name="Google Shape;153;p23"/>
           <p:cNvSpPr txBox="1"/>
           <p:nvPr/>
         </p:nvSpPr>
@@ -12588,7 +12668,7 @@
       </p:sp>
       <p:sp>
         <p:nvSpPr>
-          <p:cNvPr id="153" name="Google Shape;153;p23"/>
+          <p:cNvPr id="154" name="Google Shape;154;p23"/>
           <p:cNvSpPr txBox="1"/>
           <p:nvPr/>
         </p:nvSpPr>
@@ -12760,7 +12840,7 @@
       </p:sp>
       <p:sp>
         <p:nvSpPr>
-          <p:cNvPr id="154" name="Google Shape;154;p23"/>
+          <p:cNvPr id="155" name="Google Shape;155;p23"/>
           <p:cNvSpPr txBox="1"/>
           <p:nvPr/>
         </p:nvSpPr>
@@ -13032,7 +13112,7 @@
       </p:sp>
       <p:sp>
         <p:nvSpPr>
-          <p:cNvPr id="155" name="Google Shape;155;p23"/>
+          <p:cNvPr id="156" name="Google Shape;156;p23"/>
           <p:cNvSpPr txBox="1"/>
           <p:nvPr/>
         </p:nvSpPr>
@@ -13107,7 +13187,7 @@
       </p:sp>
       <p:sp>
         <p:nvSpPr>
-          <p:cNvPr id="156" name="Google Shape;156;p23"/>
+          <p:cNvPr id="157" name="Google Shape;157;p23"/>
           <p:cNvSpPr txBox="1"/>
           <p:nvPr/>
         </p:nvSpPr>
@@ -13173,7 +13253,7 @@
       </p:sp>
       <p:pic>
         <p:nvPicPr>
-          <p:cNvPr id="157" name="Google Shape;157;p23"/>
+          <p:cNvPr id="158" name="Google Shape;158;p23"/>
           <p:cNvPicPr preferRelativeResize="0"/>
           <p:nvPr/>
         </p:nvPicPr>
@@ -13201,7 +13281,7 @@
       </p:pic>
       <p:pic>
         <p:nvPicPr>
-          <p:cNvPr id="158" name="Google Shape;158;p23"/>
+          <p:cNvPr id="159" name="Google Shape;159;p23"/>
           <p:cNvPicPr preferRelativeResize="0"/>
           <p:nvPr/>
         </p:nvPicPr>
@@ -13234,7 +13314,7 @@
       </p:pic>
       <p:sp>
         <p:nvSpPr>
-          <p:cNvPr id="159" name="Google Shape;159;p23"/>
+          <p:cNvPr id="160" name="Google Shape;160;p23"/>
           <p:cNvSpPr txBox="1"/>
           <p:nvPr/>
         </p:nvSpPr>
@@ -13401,7 +13481,7 @@
   <p:cSld>
     <p:spTree>
       <p:nvGrpSpPr>
-        <p:cNvPr id="1" name="Shape 163"/>
+        <p:cNvPr id="1" name="Shape 164"/>
         <p:cNvGrpSpPr/>
         <p:nvPr/>
       </p:nvGrpSpPr>
@@ -13415,7 +13495,7 @@
       </p:grpSpPr>
       <p:sp>
         <p:nvSpPr>
-          <p:cNvPr id="164" name="Google Shape;164;p24"/>
+          <p:cNvPr id="165" name="Google Shape;165;p24"/>
           <p:cNvSpPr txBox="1"/>
           <p:nvPr/>
         </p:nvSpPr>
@@ -13535,7 +13615,7 @@
       </p:sp>
       <p:sp>
         <p:nvSpPr>
-          <p:cNvPr id="165" name="Google Shape;165;p24"/>
+          <p:cNvPr id="166" name="Google Shape;166;p24"/>
           <p:cNvSpPr txBox="1"/>
           <p:nvPr/>
         </p:nvSpPr>
@@ -13593,7 +13673,7 @@
       </p:sp>
       <p:pic>
         <p:nvPicPr>
-          <p:cNvPr id="166" name="Google Shape;166;p24"/>
+          <p:cNvPr id="167" name="Google Shape;167;p24"/>
           <p:cNvPicPr preferRelativeResize="0"/>
           <p:nvPr/>
         </p:nvPicPr>
@@ -13632,7 +13712,7 @@
       </p:pic>
       <p:sp>
         <p:nvSpPr>
-          <p:cNvPr id="167" name="Google Shape;167;p24"/>
+          <p:cNvPr id="168" name="Google Shape;168;p24"/>
           <p:cNvSpPr txBox="1"/>
           <p:nvPr/>
         </p:nvSpPr>
@@ -13768,7 +13848,7 @@
       </p:sp>
       <p:pic>
         <p:nvPicPr>
-          <p:cNvPr id="168" name="Google Shape;168;p24"/>
+          <p:cNvPr id="169" name="Google Shape;169;p24"/>
           <p:cNvPicPr preferRelativeResize="0"/>
           <p:nvPr/>
         </p:nvPicPr>
@@ -13801,7 +13881,7 @@
       </p:pic>
       <p:pic>
         <p:nvPicPr>
-          <p:cNvPr id="169" name="Google Shape;169;p24"/>
+          <p:cNvPr id="170" name="Google Shape;170;p24"/>
           <p:cNvPicPr preferRelativeResize="0"/>
           <p:nvPr/>
         </p:nvPicPr>
@@ -13845,7 +13925,7 @@
   <p:cSld>
     <p:spTree>
       <p:nvGrpSpPr>
-        <p:cNvPr id="1" name="Shape 173"/>
+        <p:cNvPr id="1" name="Shape 174"/>
         <p:cNvGrpSpPr/>
         <p:nvPr/>
       </p:nvGrpSpPr>
@@ -13859,7 +13939,7 @@
       </p:grpSpPr>
       <p:sp>
         <p:nvSpPr>
-          <p:cNvPr id="174" name="Google Shape;174;p25"/>
+          <p:cNvPr id="175" name="Google Shape;175;p25"/>
           <p:cNvSpPr txBox="1"/>
           <p:nvPr/>
         </p:nvSpPr>
@@ -13934,7 +14014,7 @@
       </p:sp>
       <p:sp>
         <p:nvSpPr>
-          <p:cNvPr id="175" name="Google Shape;175;p25"/>
+          <p:cNvPr id="176" name="Google Shape;176;p25"/>
           <p:cNvSpPr txBox="1"/>
           <p:nvPr/>
         </p:nvSpPr>
@@ -13992,7 +14072,7 @@
       </p:sp>
       <p:sp>
         <p:nvSpPr>
-          <p:cNvPr id="176" name="Google Shape;176;p25"/>
+          <p:cNvPr id="177" name="Google Shape;177;p25"/>
           <p:cNvSpPr txBox="1"/>
           <p:nvPr/>
         </p:nvSpPr>
@@ -14161,7 +14241,7 @@
       </p:sp>
       <p:sp>
         <p:nvSpPr>
-          <p:cNvPr id="177" name="Google Shape;177;p25"/>
+          <p:cNvPr id="178" name="Google Shape;178;p25"/>
           <p:cNvSpPr txBox="1"/>
           <p:nvPr/>
         </p:nvSpPr>
@@ -14276,7 +14356,7 @@
       </p:sp>
       <p:sp>
         <p:nvSpPr>
-          <p:cNvPr id="178" name="Google Shape;178;p25"/>
+          <p:cNvPr id="179" name="Google Shape;179;p25"/>
           <p:cNvSpPr txBox="1"/>
           <p:nvPr/>
         </p:nvSpPr>
@@ -14346,6 +14426,143 @@
           </a:p>
         </p:txBody>
       </p:sp>
+      <p:sp>
+        <p:nvSpPr>
+          <p:cNvPr id="180" name="Google Shape;180;p25"/>
+          <p:cNvSpPr txBox="1"/>
+          <p:nvPr/>
+        </p:nvSpPr>
+        <p:spPr>
+          <a:xfrm>
+            <a:off x="4625450" y="1446975"/>
+            <a:ext cx="4432200" cy="1163700"/>
+          </a:xfrm>
+          <a:prstGeom prst="rect">
+            <a:avLst/>
+          </a:prstGeom>
+          <a:solidFill>
+            <a:srgbClr val="FFF2CC"/>
+          </a:solidFill>
+          <a:ln w="9525" cap="flat" cmpd="sng">
+            <a:solidFill>
+              <a:srgbClr val="FF0000"/>
+            </a:solidFill>
+            <a:prstDash val="solid"/>
+            <a:round/>
+            <a:headEnd type="none" w="sm" len="sm"/>
+            <a:tailEnd type="none" w="sm" len="sm"/>
+          </a:ln>
+        </p:spPr>
+        <p:txBody>
+          <a:bodyPr spcFirstLastPara="1" wrap="square" lIns="27425" tIns="27425" rIns="27425" bIns="27425" anchor="t" anchorCtr="0">
+            <a:spAutoFit/>
+          </a:bodyPr>
+          <a:lstStyle/>
+          <a:p>
+            <a:pPr marL="0" lvl="0" indent="0" algn="l" rtl="0">
+              <a:spcBef>
+                <a:spcPts val="0"/>
+              </a:spcBef>
+              <a:spcAft>
+                <a:spcPts val="0"/>
+              </a:spcAft>
+              <a:buClr>
+                <a:schemeClr val="dk1"/>
+              </a:buClr>
+              <a:buSzPts val="1100"/>
+              <a:buFont typeface="Arial"/>
+              <a:buNone/>
+            </a:pPr>
+            <a:r>
+              <a:rPr lang="en" sz="1300" b="1">
+                <a:solidFill>
+                  <a:srgbClr val="FF0000"/>
+                </a:solidFill>
+                <a:latin typeface="Calibri"/>
+                <a:ea typeface="Calibri"/>
+                <a:cs typeface="Calibri"/>
+                <a:sym typeface="Calibri"/>
+              </a:rPr>
+              <a:t>Meta CEO Mark Zuckerberg</a:t>
+            </a:r>
+            <a:r>
+              <a:rPr lang="en" sz="1300">
+                <a:latin typeface="Calibri"/>
+                <a:ea typeface="Calibri"/>
+                <a:cs typeface="Calibri"/>
+                <a:sym typeface="Calibri"/>
+              </a:rPr>
+              <a:t> on April 24 said the company would continue to meaningfully grow its investments in artificial intelligence (AI) ... increasing its capital expenditure projections to </a:t>
+            </a:r>
+            <a:r>
+              <a:rPr lang="en" sz="1300" b="1">
+                <a:solidFill>
+                  <a:srgbClr val="FF0000"/>
+                </a:solidFill>
+                <a:latin typeface="Calibri"/>
+                <a:ea typeface="Calibri"/>
+                <a:cs typeface="Calibri"/>
+                <a:sym typeface="Calibri"/>
+              </a:rPr>
+              <a:t>$35-$40 Bln for 2024</a:t>
+            </a:r>
+            <a:r>
+              <a:rPr lang="en" sz="1300">
+                <a:latin typeface="Calibri"/>
+                <a:ea typeface="Calibri"/>
+                <a:cs typeface="Calibri"/>
+                <a:sym typeface="Calibri"/>
+              </a:rPr>
+              <a:t>, from a prior range of $30-37 Bln,</a:t>
+            </a:r>
+            <a:endParaRPr sz="1300">
+              <a:latin typeface="Calibri"/>
+              <a:ea typeface="Calibri"/>
+              <a:cs typeface="Calibri"/>
+              <a:sym typeface="Calibri"/>
+            </a:endParaRPr>
+          </a:p>
+          <a:p>
+            <a:pPr marL="0" lvl="0" indent="0" algn="l" rtl="0">
+              <a:spcBef>
+                <a:spcPts val="0"/>
+              </a:spcBef>
+              <a:spcAft>
+                <a:spcPts val="0"/>
+              </a:spcAft>
+              <a:buNone/>
+            </a:pPr>
+            <a:r>
+              <a:rPr lang="en" sz="1000" u="sng">
+                <a:solidFill>
+                  <a:schemeClr val="hlink"/>
+                </a:solidFill>
+                <a:latin typeface="Calibri"/>
+                <a:ea typeface="Calibri"/>
+                <a:cs typeface="Calibri"/>
+                <a:sym typeface="Calibri"/>
+                <a:hlinkClick r:id="rId5"/>
+              </a:rPr>
+              <a:t>https://www.moneycontrol.com/news/technology/meta-to-spend-billions-more-on-ai-ceo-mark-zuckerberg-vows-long-term-gains-12707597.html</a:t>
+            </a:r>
+            <a:r>
+              <a:rPr lang="en" sz="1000">
+                <a:latin typeface="Calibri"/>
+                <a:ea typeface="Calibri"/>
+                <a:cs typeface="Calibri"/>
+                <a:sym typeface="Calibri"/>
+              </a:rPr>
+              <a:t> </a:t>
+            </a:r>
+            <a:endParaRPr sz="700">
+              <a:latin typeface="Calibri"/>
+              <a:ea typeface="Calibri"/>
+              <a:cs typeface="Calibri"/>
+              <a:sym typeface="Calibri"/>
+            </a:endParaRPr>
+          </a:p>
+        </p:txBody>
+      </p:sp>
     </p:spTree>
   </p:cSld>
   <p:clrMapOvr>
@@ -14359,7 +14576,7 @@
   <p:cSld>
     <p:spTree>
       <p:nvGrpSpPr>
-        <p:cNvPr id="1" name="Shape 182"/>
+        <p:cNvPr id="1" name="Shape 184"/>
         <p:cNvGrpSpPr/>
         <p:nvPr/>
       </p:nvGrpSpPr>
@@ -14373,7 +14590,7 @@
       </p:grpSpPr>
       <p:sp>
         <p:nvSpPr>
-          <p:cNvPr id="183" name="Google Shape;183;p26"/>
+          <p:cNvPr id="185" name="Google Shape;185;p26"/>
           <p:cNvSpPr txBox="1"/>
           <p:nvPr/>
         </p:nvSpPr>
@@ -14471,7 +14688,7 @@
       </p:sp>
       <p:sp>
         <p:nvSpPr>
-          <p:cNvPr id="184" name="Google Shape;184;p26"/>
+          <p:cNvPr id="186" name="Google Shape;186;p26"/>
           <p:cNvSpPr txBox="1"/>
           <p:nvPr/>
         </p:nvSpPr>
@@ -14529,7 +14746,7 @@
       </p:sp>
       <p:pic>
         <p:nvPicPr>
-          <p:cNvPr id="185" name="Google Shape;185;p26"/>
+          <p:cNvPr id="187" name="Google Shape;187;p26"/>
           <p:cNvPicPr preferRelativeResize="0"/>
           <p:nvPr/>
         </p:nvPicPr>
@@ -14562,7 +14779,7 @@
       </p:pic>
       <p:sp>
         <p:nvSpPr>
-          <p:cNvPr id="186" name="Google Shape;186;p26"/>
+          <p:cNvPr id="188" name="Google Shape;188;p26"/>
           <p:cNvSpPr txBox="1"/>
           <p:nvPr/>
         </p:nvSpPr>
@@ -14808,7 +15025,7 @@
   <p:cSld>
     <p:spTree>
       <p:nvGrpSpPr>
-        <p:cNvPr id="1" name="Shape 190"/>
+        <p:cNvPr id="1" name="Shape 192"/>
         <p:cNvGrpSpPr/>
         <p:nvPr/>
       </p:nvGrpSpPr>
@@ -14822,7 +15039,7 @@
       </p:grpSpPr>
       <p:sp>
         <p:nvSpPr>
-          <p:cNvPr id="191" name="Google Shape;191;p27"/>
+          <p:cNvPr id="193" name="Google Shape;193;p27"/>
           <p:cNvSpPr txBox="1"/>
           <p:nvPr/>
         </p:nvSpPr>
@@ -15117,7 +15334,7 @@
       </p:sp>
       <p:pic>
         <p:nvPicPr>
-          <p:cNvPr id="192" name="Google Shape;192;p27"/>
+          <p:cNvPr id="194" name="Google Shape;194;p27"/>
           <p:cNvPicPr preferRelativeResize="0"/>
           <p:nvPr/>
         </p:nvPicPr>
@@ -15150,7 +15367,7 @@
       </p:pic>
       <p:sp>
         <p:nvSpPr>
-          <p:cNvPr id="193" name="Google Shape;193;p27"/>
+          <p:cNvPr id="195" name="Google Shape;195;p27"/>
           <p:cNvSpPr txBox="1"/>
           <p:nvPr/>
         </p:nvSpPr>
@@ -15219,7 +15436,7 @@
   <p:cSld>
     <p:spTree>
       <p:nvGrpSpPr>
-        <p:cNvPr id="1" name="Shape 197"/>
+        <p:cNvPr id="1" name="Shape 199"/>
         <p:cNvGrpSpPr/>
         <p:nvPr/>
       </p:nvGrpSpPr>
@@ -15233,7 +15450,7 @@
       </p:grpSpPr>
       <p:sp>
         <p:nvSpPr>
-          <p:cNvPr id="198" name="Google Shape;198;p28"/>
+          <p:cNvPr id="200" name="Google Shape;200;p28"/>
           <p:cNvSpPr txBox="1"/>
           <p:nvPr/>
         </p:nvSpPr>
@@ -15291,7 +15508,7 @@
       </p:sp>
       <p:sp>
         <p:nvSpPr>
-          <p:cNvPr id="199" name="Google Shape;199;p28"/>
+          <p:cNvPr id="201" name="Google Shape;201;p28"/>
           <p:cNvSpPr txBox="1"/>
           <p:nvPr/>
         </p:nvSpPr>
@@ -15978,7 +16195,7 @@
       </p:sp>
       <p:pic>
         <p:nvPicPr>
-          <p:cNvPr id="200" name="Google Shape;200;p28"/>
+          <p:cNvPr id="202" name="Google Shape;202;p28"/>
           <p:cNvPicPr preferRelativeResize="0"/>
           <p:nvPr/>
         </p:nvPicPr>
@@ -16011,7 +16228,7 @@
       </p:pic>
       <p:sp>
         <p:nvSpPr>
-          <p:cNvPr id="201" name="Google Shape;201;p28"/>
+          <p:cNvPr id="203" name="Google Shape;203;p28"/>
           <p:cNvSpPr txBox="1"/>
           <p:nvPr/>
         </p:nvSpPr>
@@ -16077,7 +16294,7 @@
       </p:sp>
       <p:sp>
         <p:nvSpPr>
-          <p:cNvPr id="202" name="Google Shape;202;p28"/>
+          <p:cNvPr id="204" name="Google Shape;204;p28"/>
           <p:cNvSpPr txBox="1"/>
           <p:nvPr/>
         </p:nvSpPr>
@@ -16204,7 +16421,7 @@
   <p:cSld>
     <p:spTree>
       <p:nvGrpSpPr>
-        <p:cNvPr id="1" name="Shape 206"/>
+        <p:cNvPr id="1" name="Shape 208"/>
         <p:cNvGrpSpPr/>
         <p:nvPr/>
       </p:nvGrpSpPr>
@@ -16218,7 +16435,7 @@
       </p:grpSpPr>
       <p:pic>
         <p:nvPicPr>
-          <p:cNvPr id="207" name="Google Shape;207;p29"/>
+          <p:cNvPr id="209" name="Google Shape;209;p29"/>
           <p:cNvPicPr preferRelativeResize="0"/>
           <p:nvPr/>
         </p:nvPicPr>
@@ -16251,7 +16468,7 @@
       </p:pic>
       <p:sp>
         <p:nvSpPr>
-          <p:cNvPr id="208" name="Google Shape;208;p29"/>
+          <p:cNvPr id="210" name="Google Shape;210;p29"/>
           <p:cNvSpPr txBox="1"/>
           <p:nvPr/>
         </p:nvSpPr>
@@ -16341,7 +16558,7 @@
       </p:sp>
       <p:sp>
         <p:nvSpPr>
-          <p:cNvPr id="209" name="Google Shape;209;p29"/>
+          <p:cNvPr id="211" name="Google Shape;211;p29"/>
           <p:cNvSpPr txBox="1"/>
           <p:nvPr/>
         </p:nvSpPr>
@@ -16432,7 +16649,7 @@
       </p:sp>
       <p:sp>
         <p:nvSpPr>
-          <p:cNvPr id="210" name="Google Shape;210;p29"/>
+          <p:cNvPr id="212" name="Google Shape;212;p29"/>
           <p:cNvSpPr txBox="1"/>
           <p:nvPr/>
         </p:nvSpPr>
@@ -16640,7 +16857,7 @@
       </p:sp>
       <p:sp>
         <p:nvSpPr>
-          <p:cNvPr id="211" name="Google Shape;211;p29"/>
+          <p:cNvPr id="213" name="Google Shape;213;p29"/>
           <p:cNvSpPr/>
           <p:nvPr/>
         </p:nvSpPr>
@@ -16684,7 +16901,7 @@
       </p:sp>
       <p:sp>
         <p:nvSpPr>
-          <p:cNvPr id="212" name="Google Shape;212;p29"/>
+          <p:cNvPr id="214" name="Google Shape;214;p29"/>
           <p:cNvSpPr/>
           <p:nvPr/>
         </p:nvSpPr>
@@ -16739,7 +16956,7 @@
   <p:cSld>
     <p:spTree>
       <p:nvGrpSpPr>
-        <p:cNvPr id="1" name="Shape 216"/>
+        <p:cNvPr id="1" name="Shape 218"/>
         <p:cNvGrpSpPr/>
         <p:nvPr/>
       </p:nvGrpSpPr>
@@ -16753,7 +16970,7 @@
       </p:grpSpPr>
       <p:pic>
         <p:nvPicPr>
-          <p:cNvPr id="217" name="Google Shape;217;p30"/>
+          <p:cNvPr id="219" name="Google Shape;219;p30"/>
           <p:cNvPicPr preferRelativeResize="0"/>
           <p:nvPr/>
         </p:nvPicPr>
@@ -16780,7 +16997,7 @@
       </p:pic>
       <p:sp>
         <p:nvSpPr>
-          <p:cNvPr id="218" name="Google Shape;218;p30"/>
+          <p:cNvPr id="220" name="Google Shape;220;p30"/>
           <p:cNvSpPr txBox="1"/>
           <p:nvPr/>
         </p:nvSpPr>
@@ -16846,7 +17063,7 @@
       </p:sp>
       <p:sp>
         <p:nvSpPr>
-          <p:cNvPr id="219" name="Google Shape;219;p30"/>
+          <p:cNvPr id="221" name="Google Shape;221;p30"/>
           <p:cNvSpPr txBox="1"/>
           <p:nvPr/>
         </p:nvSpPr>
@@ -17276,7 +17493,7 @@
       </p:sp>
       <p:pic>
         <p:nvPicPr>
-          <p:cNvPr id="220" name="Google Shape;220;p30"/>
+          <p:cNvPr id="222" name="Google Shape;222;p30"/>
           <p:cNvPicPr preferRelativeResize="0"/>
           <p:nvPr/>
         </p:nvPicPr>
@@ -17308,7 +17525,7 @@
       </p:pic>
       <p:sp>
         <p:nvSpPr>
-          <p:cNvPr id="221" name="Google Shape;221;p30"/>
+          <p:cNvPr id="223" name="Google Shape;223;p30"/>
           <p:cNvSpPr txBox="1"/>
           <p:nvPr/>
         </p:nvSpPr>
@@ -17387,7 +17604,7 @@
       </p:sp>
       <p:sp>
         <p:nvSpPr>
-          <p:cNvPr id="222" name="Google Shape;222;p30"/>
+          <p:cNvPr id="224" name="Google Shape;224;p30"/>
           <p:cNvSpPr txBox="1"/>
           <p:nvPr/>
         </p:nvSpPr>
@@ -17464,7 +17681,7 @@
   <p:cSld>
     <p:spTree>
       <p:nvGrpSpPr>
-        <p:cNvPr id="1" name="Shape 226"/>
+        <p:cNvPr id="1" name="Shape 228"/>
         <p:cNvGrpSpPr/>
         <p:nvPr/>
       </p:nvGrpSpPr>
@@ -17478,7 +17695,7 @@
       </p:grpSpPr>
       <p:sp>
         <p:nvSpPr>
-          <p:cNvPr id="227" name="Google Shape;227;p31"/>
+          <p:cNvPr id="229" name="Google Shape;229;p31"/>
           <p:cNvSpPr txBox="1"/>
           <p:nvPr/>
         </p:nvSpPr>
@@ -17933,7 +18150,7 @@
         </p:nvSpPr>
         <p:spPr>
           <a:xfrm>
-            <a:off x="76200" y="499525"/>
+            <a:off x="76200" y="423325"/>
             <a:ext cx="4383300" cy="1533000"/>
           </a:xfrm>
           <a:prstGeom prst="rect">
@@ -18254,7 +18471,7 @@
         </p:nvSpPr>
         <p:spPr>
           <a:xfrm>
-            <a:off x="76200" y="2160350"/>
+            <a:off x="76200" y="2007950"/>
             <a:ext cx="3727200" cy="2118000"/>
           </a:xfrm>
           <a:prstGeom prst="rect">
@@ -18650,7 +18867,7 @@
         </p:blipFill>
         <p:spPr>
           <a:xfrm>
-            <a:off x="3328125" y="2853200"/>
+            <a:off x="3328125" y="2700800"/>
             <a:ext cx="1131374" cy="1131374"/>
           </a:xfrm>
           <a:prstGeom prst="rect">
@@ -18843,6 +19060,119 @@
           </a:ln>
         </p:spPr>
       </p:pic>
+      <p:sp>
+        <p:nvSpPr>
+          <p:cNvPr id="81" name="Google Shape;81;p16"/>
+          <p:cNvSpPr txBox="1"/>
+          <p:nvPr/>
+        </p:nvSpPr>
+        <p:spPr>
+          <a:xfrm>
+            <a:off x="76200" y="4225076"/>
+            <a:ext cx="4383300" cy="794100"/>
+          </a:xfrm>
+          <a:prstGeom prst="rect">
+            <a:avLst/>
+          </a:prstGeom>
+          <a:solidFill>
+            <a:srgbClr val="FFF2CC"/>
+          </a:solidFill>
+          <a:ln w="9525" cap="flat" cmpd="sng">
+            <a:solidFill>
+              <a:srgbClr val="FF0000"/>
+            </a:solidFill>
+            <a:prstDash val="solid"/>
+            <a:round/>
+            <a:headEnd type="none" w="sm" len="sm"/>
+            <a:tailEnd type="none" w="sm" len="sm"/>
+          </a:ln>
+        </p:spPr>
+        <p:txBody>
+          <a:bodyPr spcFirstLastPara="1" wrap="square" lIns="27425" tIns="27425" rIns="27425" bIns="27425" anchor="t" anchorCtr="0">
+            <a:spAutoFit/>
+          </a:bodyPr>
+          <a:lstStyle/>
+          <a:p>
+            <a:pPr marL="0" lvl="0" indent="0" algn="l" rtl="0">
+              <a:spcBef>
+                <a:spcPts val="0"/>
+              </a:spcBef>
+              <a:spcAft>
+                <a:spcPts val="0"/>
+              </a:spcAft>
+              <a:buNone/>
+            </a:pPr>
+            <a:r>
+              <a:rPr lang="en" sz="1200">
+                <a:solidFill>
+                  <a:schemeClr val="dk1"/>
+                </a:solidFill>
+                <a:latin typeface="Calibri"/>
+                <a:ea typeface="Calibri"/>
+                <a:cs typeface="Calibri"/>
+                <a:sym typeface="Calibri"/>
+              </a:rPr>
+              <a:t>Run Llama3-70B on your phone using </a:t>
+            </a:r>
+            <a:r>
+              <a:rPr lang="en" sz="1200" b="1">
+                <a:solidFill>
+                  <a:srgbClr val="FF0000"/>
+                </a:solidFill>
+                <a:latin typeface="Calibri"/>
+                <a:ea typeface="Calibri"/>
+                <a:cs typeface="Calibri"/>
+                <a:sym typeface="Calibri"/>
+              </a:rPr>
+              <a:t>HuggingChat app</a:t>
+            </a:r>
+            <a:r>
+              <a:rPr lang="en" sz="1200">
+                <a:solidFill>
+                  <a:schemeClr val="dk1"/>
+                </a:solidFill>
+                <a:latin typeface="Calibri"/>
+                <a:ea typeface="Calibri"/>
+                <a:cs typeface="Calibri"/>
+                <a:sym typeface="Calibri"/>
+              </a:rPr>
+              <a:t>:</a:t>
+            </a:r>
+            <a:br>
+              <a:rPr lang="en" sz="1200">
+                <a:solidFill>
+                  <a:schemeClr val="dk1"/>
+                </a:solidFill>
+                <a:latin typeface="Calibri"/>
+                <a:ea typeface="Calibri"/>
+                <a:cs typeface="Calibri"/>
+                <a:sym typeface="Calibri"/>
+              </a:rPr>
+            </a:br>
+            <a:r>
+              <a:rPr lang="en" sz="1200">
+                <a:solidFill>
+                  <a:schemeClr val="dk1"/>
+                </a:solidFill>
+                <a:latin typeface="Calibri"/>
+                <a:ea typeface="Calibri"/>
+                <a:cs typeface="Calibri"/>
+                <a:sym typeface="Calibri"/>
+              </a:rPr>
+              <a:t>Download the HuggingChat app from the App Store or access it directly in the browser. Sign in using a Hugging Face account or Apple ID, select the model in settings, startusing.</a:t>
+            </a:r>
+            <a:endParaRPr sz="1200">
+              <a:solidFill>
+                <a:srgbClr val="3C78D8"/>
+              </a:solidFill>
+              <a:latin typeface="Roboto Mono"/>
+              <a:ea typeface="Roboto Mono"/>
+              <a:cs typeface="Roboto Mono"/>
+              <a:sym typeface="Roboto Mono"/>
+            </a:endParaRPr>
+          </a:p>
+        </p:txBody>
+      </p:sp>
     </p:spTree>
   </p:cSld>
   <p:clrMapOvr>
@@ -18856,7 +19186,7 @@
   <p:cSld>
     <p:spTree>
       <p:nvGrpSpPr>
-        <p:cNvPr id="1" name="Shape 84"/>
+        <p:cNvPr id="1" name="Shape 85"/>
         <p:cNvGrpSpPr/>
         <p:nvPr/>
       </p:nvGrpSpPr>
@@ -18870,7 +19200,7 @@
       </p:grpSpPr>
       <p:sp>
         <p:nvSpPr>
-          <p:cNvPr id="85" name="Google Shape;85;p17"/>
+          <p:cNvPr id="86" name="Google Shape;86;p17"/>
           <p:cNvSpPr txBox="1"/>
           <p:nvPr/>
         </p:nvSpPr>
@@ -19011,7 +19341,7 @@
       </p:sp>
       <p:sp>
         <p:nvSpPr>
-          <p:cNvPr id="86" name="Google Shape;86;p17"/>
+          <p:cNvPr id="87" name="Google Shape;87;p17"/>
           <p:cNvSpPr txBox="1"/>
           <p:nvPr/>
         </p:nvSpPr>
@@ -19125,7 +19455,7 @@
       </p:sp>
       <p:sp>
         <p:nvSpPr>
-          <p:cNvPr id="87" name="Google Shape;87;p17"/>
+          <p:cNvPr id="88" name="Google Shape;88;p17"/>
           <p:cNvSpPr txBox="1"/>
           <p:nvPr/>
         </p:nvSpPr>
@@ -19191,7 +19521,7 @@
       </p:sp>
       <p:sp>
         <p:nvSpPr>
-          <p:cNvPr id="88" name="Google Shape;88;p17"/>
+          <p:cNvPr id="89" name="Google Shape;89;p17"/>
           <p:cNvSpPr txBox="1"/>
           <p:nvPr/>
         </p:nvSpPr>
@@ -19282,7 +19612,7 @@
       </p:sp>
       <p:pic>
         <p:nvPicPr>
-          <p:cNvPr id="89" name="Google Shape;89;p17"/>
+          <p:cNvPr id="90" name="Google Shape;90;p17"/>
           <p:cNvPicPr preferRelativeResize="0"/>
           <p:nvPr/>
         </p:nvPicPr>
@@ -19315,7 +19645,7 @@
       </p:pic>
       <p:pic>
         <p:nvPicPr>
-          <p:cNvPr id="90" name="Google Shape;90;p17"/>
+          <p:cNvPr id="91" name="Google Shape;91;p17"/>
           <p:cNvPicPr preferRelativeResize="0"/>
           <p:nvPr/>
         </p:nvPicPr>
@@ -19347,7 +19677,7 @@
       </p:pic>
       <p:pic>
         <p:nvPicPr>
-          <p:cNvPr id="91" name="Google Shape;91;p17"/>
+          <p:cNvPr id="92" name="Google Shape;92;p17"/>
           <p:cNvPicPr preferRelativeResize="0"/>
           <p:nvPr/>
         </p:nvPicPr>
@@ -19380,7 +19710,7 @@
       </p:pic>
       <p:sp>
         <p:nvSpPr>
-          <p:cNvPr id="92" name="Google Shape;92;p17"/>
+          <p:cNvPr id="93" name="Google Shape;93;p17"/>
           <p:cNvSpPr txBox="1"/>
           <p:nvPr/>
         </p:nvSpPr>
@@ -19614,7 +19944,7 @@
       </p:sp>
       <p:sp>
         <p:nvSpPr>
-          <p:cNvPr id="93" name="Google Shape;93;p17"/>
+          <p:cNvPr id="94" name="Google Shape;94;p17"/>
           <p:cNvSpPr/>
           <p:nvPr/>
         </p:nvSpPr>
@@ -19660,7 +19990,7 @@
       </p:sp>
       <p:sp>
         <p:nvSpPr>
-          <p:cNvPr id="94" name="Google Shape;94;p17"/>
+          <p:cNvPr id="95" name="Google Shape;95;p17"/>
           <p:cNvSpPr/>
           <p:nvPr/>
         </p:nvSpPr>
@@ -19706,7 +20036,7 @@
       </p:sp>
       <p:sp>
         <p:nvSpPr>
-          <p:cNvPr id="95" name="Google Shape;95;p17"/>
+          <p:cNvPr id="96" name="Google Shape;96;p17"/>
           <p:cNvSpPr/>
           <p:nvPr/>
         </p:nvSpPr>
@@ -19752,7 +20082,7 @@
       </p:sp>
       <p:sp>
         <p:nvSpPr>
-          <p:cNvPr id="96" name="Google Shape;96;p17"/>
+          <p:cNvPr id="97" name="Google Shape;97;p17"/>
           <p:cNvSpPr/>
           <p:nvPr/>
         </p:nvSpPr>
@@ -19798,7 +20128,7 @@
       </p:sp>
       <p:sp>
         <p:nvSpPr>
-          <p:cNvPr id="97" name="Google Shape;97;p17"/>
+          <p:cNvPr id="98" name="Google Shape;98;p17"/>
           <p:cNvSpPr/>
           <p:nvPr/>
         </p:nvSpPr>
@@ -19844,7 +20174,7 @@
       </p:sp>
       <p:sp>
         <p:nvSpPr>
-          <p:cNvPr id="98" name="Google Shape;98;p17"/>
+          <p:cNvPr id="99" name="Google Shape;99;p17"/>
           <p:cNvSpPr/>
           <p:nvPr/>
         </p:nvSpPr>
@@ -19890,7 +20220,7 @@
       </p:sp>
       <p:sp>
         <p:nvSpPr>
-          <p:cNvPr id="99" name="Google Shape;99;p17"/>
+          <p:cNvPr id="100" name="Google Shape;100;p17"/>
           <p:cNvSpPr/>
           <p:nvPr/>
         </p:nvSpPr>
@@ -19936,7 +20266,7 @@
       </p:sp>
       <p:sp>
         <p:nvSpPr>
-          <p:cNvPr id="100" name="Google Shape;100;p17"/>
+          <p:cNvPr id="101" name="Google Shape;101;p17"/>
           <p:cNvSpPr/>
           <p:nvPr/>
         </p:nvSpPr>
@@ -19982,7 +20312,7 @@
       </p:sp>
       <p:sp>
         <p:nvSpPr>
-          <p:cNvPr id="101" name="Google Shape;101;p17"/>
+          <p:cNvPr id="102" name="Google Shape;102;p17"/>
           <p:cNvSpPr/>
           <p:nvPr/>
         </p:nvSpPr>
@@ -20028,7 +20358,7 @@
       </p:sp>
       <p:sp>
         <p:nvSpPr>
-          <p:cNvPr id="102" name="Google Shape;102;p17"/>
+          <p:cNvPr id="103" name="Google Shape;103;p17"/>
           <p:cNvSpPr/>
           <p:nvPr/>
         </p:nvSpPr>
@@ -20074,7 +20404,7 @@
       </p:sp>
       <p:sp>
         <p:nvSpPr>
-          <p:cNvPr id="103" name="Google Shape;103;p17"/>
+          <p:cNvPr id="104" name="Google Shape;104;p17"/>
           <p:cNvSpPr/>
           <p:nvPr/>
         </p:nvSpPr>
@@ -20120,7 +20450,7 @@
       </p:sp>
       <p:sp>
         <p:nvSpPr>
-          <p:cNvPr id="104" name="Google Shape;104;p17"/>
+          <p:cNvPr id="105" name="Google Shape;105;p17"/>
           <p:cNvSpPr/>
           <p:nvPr/>
         </p:nvSpPr>
@@ -20177,7 +20507,7 @@
   <p:cSld>
     <p:spTree>
       <p:nvGrpSpPr>
-        <p:cNvPr id="1" name="Shape 108"/>
+        <p:cNvPr id="1" name="Shape 109"/>
         <p:cNvGrpSpPr/>
         <p:nvPr/>
       </p:nvGrpSpPr>
@@ -20191,7 +20521,7 @@
       </p:grpSpPr>
       <p:sp>
         <p:nvSpPr>
-          <p:cNvPr id="109" name="Google Shape;109;p18"/>
+          <p:cNvPr id="110" name="Google Shape;110;p18"/>
           <p:cNvSpPr txBox="1"/>
           <p:nvPr/>
         </p:nvSpPr>
@@ -20804,7 +21134,7 @@
       </p:sp>
       <p:sp>
         <p:nvSpPr>
-          <p:cNvPr id="110" name="Google Shape;110;p18"/>
+          <p:cNvPr id="111" name="Google Shape;111;p18"/>
           <p:cNvSpPr txBox="1"/>
           <p:nvPr/>
         </p:nvSpPr>
@@ -20862,7 +21192,7 @@
       </p:sp>
       <p:pic>
         <p:nvPicPr>
-          <p:cNvPr id="111" name="Google Shape;111;p18"/>
+          <p:cNvPr id="112" name="Google Shape;112;p18"/>
           <p:cNvPicPr preferRelativeResize="0"/>
           <p:nvPr/>
         </p:nvPicPr>
@@ -20906,7 +21236,7 @@
   <p:cSld>
     <p:spTree>
       <p:nvGrpSpPr>
-        <p:cNvPr id="1" name="Shape 115"/>
+        <p:cNvPr id="1" name="Shape 116"/>
         <p:cNvGrpSpPr/>
         <p:nvPr/>
       </p:nvGrpSpPr>
@@ -20920,7 +21250,7 @@
       </p:grpSpPr>
       <p:sp>
         <p:nvSpPr>
-          <p:cNvPr id="116" name="Google Shape;116;p19"/>
+          <p:cNvPr id="117" name="Google Shape;117;p19"/>
           <p:cNvSpPr txBox="1"/>
           <p:nvPr/>
         </p:nvSpPr>
@@ -20978,7 +21308,7 @@
       </p:sp>
       <p:sp>
         <p:nvSpPr>
-          <p:cNvPr id="117" name="Google Shape;117;p19"/>
+          <p:cNvPr id="118" name="Google Shape;118;p19"/>
           <p:cNvSpPr txBox="1"/>
           <p:nvPr/>
         </p:nvSpPr>
@@ -21309,7 +21639,7 @@
       </p:sp>
       <p:pic>
         <p:nvPicPr>
-          <p:cNvPr id="118" name="Google Shape;118;p19"/>
+          <p:cNvPr id="119" name="Google Shape;119;p19"/>
           <p:cNvPicPr preferRelativeResize="0"/>
           <p:nvPr/>
         </p:nvPicPr>
@@ -21348,7 +21678,7 @@
       </p:pic>
       <p:pic>
         <p:nvPicPr>
-          <p:cNvPr id="119" name="Google Shape;119;p19"/>
+          <p:cNvPr id="120" name="Google Shape;120;p19"/>
           <p:cNvPicPr preferRelativeResize="0"/>
           <p:nvPr/>
         </p:nvPicPr>
@@ -21391,7 +21721,7 @@
   <p:cSld>
     <p:spTree>
       <p:nvGrpSpPr>
-        <p:cNvPr id="1" name="Shape 123"/>
+        <p:cNvPr id="1" name="Shape 124"/>
         <p:cNvGrpSpPr/>
         <p:nvPr/>
       </p:nvGrpSpPr>
@@ -21405,7 +21735,7 @@
       </p:grpSpPr>
       <p:sp>
         <p:nvSpPr>
-          <p:cNvPr id="124" name="Google Shape;124;p20"/>
+          <p:cNvPr id="125" name="Google Shape;125;p20"/>
           <p:cNvSpPr txBox="1"/>
           <p:nvPr/>
         </p:nvSpPr>
@@ -21465,7 +21795,7 @@
       </p:sp>
       <p:sp>
         <p:nvSpPr>
-          <p:cNvPr id="125" name="Google Shape;125;p20"/>
+          <p:cNvPr id="126" name="Google Shape;126;p20"/>
           <p:cNvSpPr txBox="1"/>
           <p:nvPr/>
         </p:nvSpPr>
@@ -21628,7 +21958,7 @@
       </p:sp>
       <p:pic>
         <p:nvPicPr>
-          <p:cNvPr id="126" name="Google Shape;126;p20"/>
+          <p:cNvPr id="127" name="Google Shape;127;p20"/>
           <p:cNvPicPr preferRelativeResize="0"/>
           <p:nvPr/>
         </p:nvPicPr>
@@ -21661,7 +21991,7 @@
       </p:pic>
       <p:pic>
         <p:nvPicPr>
-          <p:cNvPr id="127" name="Google Shape;127;p20"/>
+          <p:cNvPr id="128" name="Google Shape;128;p20"/>
           <p:cNvPicPr preferRelativeResize="0"/>
           <p:nvPr/>
         </p:nvPicPr>
@@ -21700,7 +22030,7 @@
       </p:pic>
       <p:sp>
         <p:nvSpPr>
-          <p:cNvPr id="128" name="Google Shape;128;p20"/>
+          <p:cNvPr id="129" name="Google Shape;129;p20"/>
           <p:cNvSpPr txBox="1"/>
           <p:nvPr/>
         </p:nvSpPr>
@@ -21772,7 +22102,7 @@
       </p:sp>
       <p:pic>
         <p:nvPicPr>
-          <p:cNvPr id="129" name="Google Shape;129;p20"/>
+          <p:cNvPr id="130" name="Google Shape;130;p20"/>
           <p:cNvPicPr preferRelativeResize="0"/>
           <p:nvPr/>
         </p:nvPicPr>
@@ -21815,7 +22145,7 @@
   <p:cSld>
     <p:spTree>
       <p:nvGrpSpPr>
-        <p:cNvPr id="1" name="Shape 133"/>
+        <p:cNvPr id="1" name="Shape 134"/>
         <p:cNvGrpSpPr/>
         <p:nvPr/>
       </p:nvGrpSpPr>
@@ -21829,7 +22159,7 @@
       </p:grpSpPr>
       <p:sp>
         <p:nvSpPr>
-          <p:cNvPr id="134" name="Google Shape;134;p21"/>
+          <p:cNvPr id="135" name="Google Shape;135;p21"/>
           <p:cNvSpPr txBox="1"/>
           <p:nvPr/>
         </p:nvSpPr>
@@ -21887,7 +22217,7 @@
       </p:sp>
       <p:sp>
         <p:nvSpPr>
-          <p:cNvPr id="135" name="Google Shape;135;p21"/>
+          <p:cNvPr id="136" name="Google Shape;136;p21"/>
           <p:cNvSpPr txBox="1"/>
           <p:nvPr/>
         </p:nvSpPr>
@@ -22288,7 +22618,7 @@
       </p:sp>
       <p:pic>
         <p:nvPicPr>
-          <p:cNvPr id="136" name="Google Shape;136;p21"/>
+          <p:cNvPr id="137" name="Google Shape;137;p21"/>
           <p:cNvPicPr preferRelativeResize="0"/>
           <p:nvPr/>
         </p:nvPicPr>
@@ -22332,7 +22662,7 @@
   <p:cSld>
     <p:spTree>
       <p:nvGrpSpPr>
-        <p:cNvPr id="1" name="Shape 140"/>
+        <p:cNvPr id="1" name="Shape 141"/>
         <p:cNvGrpSpPr/>
         <p:nvPr/>
       </p:nvGrpSpPr>
@@ -22346,7 +22676,7 @@
       </p:grpSpPr>
       <p:sp>
         <p:nvSpPr>
-          <p:cNvPr id="141" name="Google Shape;141;p22"/>
+          <p:cNvPr id="142" name="Google Shape;142;p22"/>
           <p:cNvSpPr txBox="1"/>
           <p:nvPr/>
         </p:nvSpPr>
@@ -22404,14 +22734,14 @@
       </p:sp>
       <p:sp>
         <p:nvSpPr>
-          <p:cNvPr id="142" name="Google Shape;142;p22"/>
+          <p:cNvPr id="143" name="Google Shape;143;p22"/>
           <p:cNvSpPr txBox="1"/>
           <p:nvPr/>
         </p:nvSpPr>
         <p:spPr>
           <a:xfrm>
             <a:off x="2689875" y="76200"/>
-            <a:ext cx="6360300" cy="1517700"/>
+            <a:ext cx="6360300" cy="1717800"/>
           </a:xfrm>
           <a:prstGeom prst="rect">
             <a:avLst/>
@@ -22466,7 +22796,30 @@
                 <a:cs typeface="Calibri"/>
                 <a:sym typeface="Calibri"/>
               </a:rPr>
-              <a:t> - 200K context length, trained on 10T tokens</a:t>
+              <a:t> </a:t>
+            </a:r>
+            <a:br>
+              <a:rPr lang="en" sz="1300">
+                <a:solidFill>
+                  <a:schemeClr val="dk1"/>
+                </a:solidFill>
+                <a:latin typeface="Calibri"/>
+                <a:ea typeface="Calibri"/>
+                <a:cs typeface="Calibri"/>
+                <a:sym typeface="Calibri"/>
+              </a:rPr>
+            </a:br>
+            <a:r>
+              <a:rPr lang="en" sz="1300">
+                <a:solidFill>
+                  <a:schemeClr val="dk1"/>
+                </a:solidFill>
+                <a:latin typeface="Calibri"/>
+                <a:ea typeface="Calibri"/>
+                <a:cs typeface="Calibri"/>
+                <a:sym typeface="Calibri"/>
+              </a:rPr>
+              <a:t>- proprietary, 600B params, 200K context length, trained on 10T tokens</a:t>
             </a:r>
             <a:endParaRPr sz="1300">
               <a:solidFill>
@@ -22507,7 +22860,7 @@
                 <a:cs typeface="Calibri"/>
                 <a:sym typeface="Calibri"/>
               </a:rPr>
-              <a:t> - partially public AI company (Hong Kong) specializing in </a:t>
+              <a:t> - partially public AI company (Hong Kong, </a:t>
             </a:r>
             <a:r>
               <a:rPr lang="en" sz="1300">
@@ -22519,16 +22872,28 @@
                 <a:cs typeface="Calibri"/>
                 <a:sym typeface="Calibri"/>
               </a:rPr>
+              <a:t>since 2014, ~3K employees</a:t>
+            </a:r>
+            <a:r>
+              <a:rPr lang="en" sz="1300">
+                <a:latin typeface="Calibri"/>
+                <a:ea typeface="Calibri"/>
+                <a:cs typeface="Calibri"/>
+                <a:sym typeface="Calibri"/>
+              </a:rPr>
+              <a:t>) specializing in </a:t>
+            </a:r>
+            <a:r>
+              <a:rPr lang="en" sz="1300">
+                <a:solidFill>
+                  <a:schemeClr val="dk1"/>
+                </a:solidFill>
+                <a:latin typeface="Calibri"/>
+                <a:ea typeface="Calibri"/>
+                <a:cs typeface="Calibri"/>
+                <a:sym typeface="Calibri"/>
+              </a:rPr>
               <a:t>facial recognition, image recognition, object detection, OCR, medical image analysis, video analysis, autonomous driving, and remote sensing. </a:t>
-            </a:r>
-            <a:r>
-              <a:rPr lang="en" sz="1300">
-                <a:latin typeface="Calibri"/>
-                <a:ea typeface="Calibri"/>
-                <a:cs typeface="Calibri"/>
-                <a:sym typeface="Calibri"/>
-              </a:rPr>
-              <a:t>Since 2014, ~ 3,000 employees</a:t>
             </a:r>
             <a:endParaRPr sz="1300">
               <a:latin typeface="Calibri"/>
@@ -22673,7 +23038,7 @@
       </p:sp>
       <p:pic>
         <p:nvPicPr>
-          <p:cNvPr id="143" name="Google Shape;143;p22"/>
+          <p:cNvPr id="144" name="Google Shape;144;p22"/>
           <p:cNvPicPr preferRelativeResize="0"/>
           <p:nvPr/>
         </p:nvPicPr>
@@ -22692,8 +23057,8 @@
         </p:blipFill>
         <p:spPr>
           <a:xfrm>
-            <a:off x="1811800" y="1645125"/>
-            <a:ext cx="7238374" cy="3403601"/>
+            <a:off x="2689875" y="2058010"/>
+            <a:ext cx="6360300" cy="2990714"/>
           </a:xfrm>
           <a:prstGeom prst="rect">
             <a:avLst/>
@@ -22706,7 +23071,7 @@
       </p:pic>
       <p:pic>
         <p:nvPicPr>
-          <p:cNvPr id="144" name="Google Shape;144;p22"/>
+          <p:cNvPr id="145" name="Google Shape;145;p22"/>
           <p:cNvPicPr preferRelativeResize="0"/>
           <p:nvPr/>
         </p:nvPicPr>
@@ -22739,7 +23104,7 @@
       </p:pic>
       <p:pic>
         <p:nvPicPr>
-          <p:cNvPr id="145" name="Google Shape;145;p22"/>
+          <p:cNvPr id="146" name="Google Shape;146;p22"/>
           <p:cNvPicPr preferRelativeResize="0"/>
           <p:nvPr/>
         </p:nvPicPr>
@@ -22758,8 +23123,8 @@
         </p:blipFill>
         <p:spPr>
           <a:xfrm>
-            <a:off x="44796" y="1647825"/>
-            <a:ext cx="1726200" cy="1293000"/>
+            <a:off x="44802" y="1647825"/>
+            <a:ext cx="2447775" cy="1833500"/>
           </a:xfrm>
           <a:prstGeom prst="rect">
             <a:avLst/>

--- a/2024/2024-04-26-AI-Updates.pptx
+++ b/2024/2024-04-26-AI-Updates.pptx
@@ -267,6 +267,11 @@
       </a:defRPr>
     </a:lvl9pPr>
   </p:defaultTextStyle>
+  <p:extLst>
+    <p:ext uri="{EFAFB233-063F-42B5-8137-9DF3F51BA10A}">
+      <p15:sldGuideLst xmlns:p15="http://schemas.microsoft.com/office/powerpoint/2012/main"/>
+    </p:ext>
+  </p:extLst>
 </p:presentation>
 </file>
 
@@ -976,7 +981,7 @@
   <p:cSld>
     <p:spTree>
       <p:nvGrpSpPr>
-        <p:cNvPr id="1" name="Shape 147"/>
+        <p:cNvPr id="1" name="Shape 149"/>
         <p:cNvGrpSpPr/>
         <p:nvPr/>
       </p:nvGrpSpPr>
@@ -990,7 +995,7 @@
       </p:grpSpPr>
       <p:sp>
         <p:nvSpPr>
-          <p:cNvPr id="148" name="Google Shape;148;g2ce34b99a12_0_1:notes"/>
+          <p:cNvPr id="150" name="Google Shape;150;g2ce34b99a12_0_1:notes"/>
           <p:cNvSpPr>
             <a:spLocks noGrp="1" noRot="1" noChangeAspect="1"/>
           </p:cNvSpPr>
@@ -1041,7 +1046,7 @@
       </p:sp>
       <p:sp>
         <p:nvSpPr>
-          <p:cNvPr id="149" name="Google Shape;149;g2ce34b99a12_0_1:notes"/>
+          <p:cNvPr id="151" name="Google Shape;151;g2ce34b99a12_0_1:notes"/>
           <p:cNvSpPr txBox="1">
             <a:spLocks noGrp="1"/>
           </p:cNvSpPr>
@@ -1098,7 +1103,7 @@
   <p:cSld>
     <p:spTree>
       <p:nvGrpSpPr>
-        <p:cNvPr id="1" name="Shape 161"/>
+        <p:cNvPr id="1" name="Shape 163"/>
         <p:cNvGrpSpPr/>
         <p:nvPr/>
       </p:nvGrpSpPr>
@@ -1112,7 +1117,7 @@
       </p:grpSpPr>
       <p:sp>
         <p:nvSpPr>
-          <p:cNvPr id="162" name="Google Shape;162;g2cec660285c_0_3:notes"/>
+          <p:cNvPr id="164" name="Google Shape;164;g2cec660285c_0_3:notes"/>
           <p:cNvSpPr>
             <a:spLocks noGrp="1" noRot="1" noChangeAspect="1"/>
           </p:cNvSpPr>
@@ -1163,7 +1168,7 @@
       </p:sp>
       <p:sp>
         <p:nvSpPr>
-          <p:cNvPr id="163" name="Google Shape;163;g2cec660285c_0_3:notes"/>
+          <p:cNvPr id="165" name="Google Shape;165;g2cec660285c_0_3:notes"/>
           <p:cNvSpPr txBox="1">
             <a:spLocks noGrp="1"/>
           </p:cNvSpPr>
@@ -1220,7 +1225,7 @@
   <p:cSld>
     <p:spTree>
       <p:nvGrpSpPr>
-        <p:cNvPr id="1" name="Shape 171"/>
+        <p:cNvPr id="1" name="Shape 173"/>
         <p:cNvGrpSpPr/>
         <p:nvPr/>
       </p:nvGrpSpPr>
@@ -1234,7 +1239,7 @@
       </p:grpSpPr>
       <p:sp>
         <p:nvSpPr>
-          <p:cNvPr id="172" name="Google Shape;172;g2cf7b08dbd5_0_17:notes"/>
+          <p:cNvPr id="174" name="Google Shape;174;g2cf7b08dbd5_0_17:notes"/>
           <p:cNvSpPr>
             <a:spLocks noGrp="1" noRot="1" noChangeAspect="1"/>
           </p:cNvSpPr>
@@ -1285,7 +1290,7 @@
       </p:sp>
       <p:sp>
         <p:nvSpPr>
-          <p:cNvPr id="173" name="Google Shape;173;g2cf7b08dbd5_0_17:notes"/>
+          <p:cNvPr id="175" name="Google Shape;175;g2cf7b08dbd5_0_17:notes"/>
           <p:cNvSpPr txBox="1">
             <a:spLocks noGrp="1"/>
           </p:cNvSpPr>
@@ -1342,7 +1347,7 @@
   <p:cSld>
     <p:spTree>
       <p:nvGrpSpPr>
-        <p:cNvPr id="1" name="Shape 181"/>
+        <p:cNvPr id="1" name="Shape 185"/>
         <p:cNvGrpSpPr/>
         <p:nvPr/>
       </p:nvGrpSpPr>
@@ -1356,7 +1361,7 @@
       </p:grpSpPr>
       <p:sp>
         <p:nvSpPr>
-          <p:cNvPr id="182" name="Google Shape;182;g2cfe703bd3c_0_31:notes"/>
+          <p:cNvPr id="186" name="Google Shape;186;g2cfe703bd3c_0_31:notes"/>
           <p:cNvSpPr>
             <a:spLocks noGrp="1" noRot="1" noChangeAspect="1"/>
           </p:cNvSpPr>
@@ -1407,7 +1412,7 @@
       </p:sp>
       <p:sp>
         <p:nvSpPr>
-          <p:cNvPr id="183" name="Google Shape;183;g2cfe703bd3c_0_31:notes"/>
+          <p:cNvPr id="187" name="Google Shape;187;g2cfe703bd3c_0_31:notes"/>
           <p:cNvSpPr txBox="1">
             <a:spLocks noGrp="1"/>
           </p:cNvSpPr>
@@ -1464,7 +1469,7 @@
   <p:cSld>
     <p:spTree>
       <p:nvGrpSpPr>
-        <p:cNvPr id="1" name="Shape 189"/>
+        <p:cNvPr id="1" name="Shape 193"/>
         <p:cNvGrpSpPr/>
         <p:nvPr/>
       </p:nvGrpSpPr>
@@ -1478,7 +1483,7 @@
       </p:grpSpPr>
       <p:sp>
         <p:nvSpPr>
-          <p:cNvPr id="190" name="Google Shape;190;g1f7f7cda57c_1_2:notes"/>
+          <p:cNvPr id="194" name="Google Shape;194;g1f7f7cda57c_1_2:notes"/>
           <p:cNvSpPr>
             <a:spLocks noGrp="1" noRot="1" noChangeAspect="1"/>
           </p:cNvSpPr>
@@ -1529,7 +1534,7 @@
       </p:sp>
       <p:sp>
         <p:nvSpPr>
-          <p:cNvPr id="191" name="Google Shape;191;g1f7f7cda57c_1_2:notes"/>
+          <p:cNvPr id="195" name="Google Shape;195;g1f7f7cda57c_1_2:notes"/>
           <p:cNvSpPr txBox="1">
             <a:spLocks noGrp="1"/>
           </p:cNvSpPr>
@@ -1586,7 +1591,7 @@
   <p:cSld>
     <p:spTree>
       <p:nvGrpSpPr>
-        <p:cNvPr id="1" name="Shape 196"/>
+        <p:cNvPr id="1" name="Shape 200"/>
         <p:cNvGrpSpPr/>
         <p:nvPr/>
       </p:nvGrpSpPr>
@@ -1600,7 +1605,7 @@
       </p:grpSpPr>
       <p:sp>
         <p:nvSpPr>
-          <p:cNvPr id="197" name="Google Shape;197;g2cec660285c_0_18:notes"/>
+          <p:cNvPr id="201" name="Google Shape;201;g2cec660285c_0_18:notes"/>
           <p:cNvSpPr>
             <a:spLocks noGrp="1" noRot="1" noChangeAspect="1"/>
           </p:cNvSpPr>
@@ -1651,7 +1656,7 @@
       </p:sp>
       <p:sp>
         <p:nvSpPr>
-          <p:cNvPr id="198" name="Google Shape;198;g2cec660285c_0_18:notes"/>
+          <p:cNvPr id="202" name="Google Shape;202;g2cec660285c_0_18:notes"/>
           <p:cNvSpPr txBox="1">
             <a:spLocks noGrp="1"/>
           </p:cNvSpPr>
@@ -1708,7 +1713,7 @@
   <p:cSld>
     <p:spTree>
       <p:nvGrpSpPr>
-        <p:cNvPr id="1" name="Shape 205"/>
+        <p:cNvPr id="1" name="Shape 209"/>
         <p:cNvGrpSpPr/>
         <p:nvPr/>
       </p:nvGrpSpPr>
@@ -1722,7 +1727,7 @@
       </p:grpSpPr>
       <p:sp>
         <p:nvSpPr>
-          <p:cNvPr id="206" name="Google Shape;206;p21:notes"/>
+          <p:cNvPr id="210" name="Google Shape;210;p21:notes"/>
           <p:cNvSpPr>
             <a:spLocks noGrp="1" noRot="1" noChangeAspect="1"/>
           </p:cNvSpPr>
@@ -1773,7 +1778,7 @@
       </p:sp>
       <p:sp>
         <p:nvSpPr>
-          <p:cNvPr id="207" name="Google Shape;207;p21:notes"/>
+          <p:cNvPr id="211" name="Google Shape;211;p21:notes"/>
           <p:cNvSpPr txBox="1">
             <a:spLocks noGrp="1"/>
           </p:cNvSpPr>
@@ -1830,7 +1835,7 @@
   <p:cSld>
     <p:spTree>
       <p:nvGrpSpPr>
-        <p:cNvPr id="1" name="Shape 215"/>
+        <p:cNvPr id="1" name="Shape 219"/>
         <p:cNvGrpSpPr/>
         <p:nvPr/>
       </p:nvGrpSpPr>
@@ -1844,7 +1849,7 @@
       </p:grpSpPr>
       <p:sp>
         <p:nvSpPr>
-          <p:cNvPr id="216" name="Google Shape;216;p22:notes"/>
+          <p:cNvPr id="220" name="Google Shape;220;p22:notes"/>
           <p:cNvSpPr>
             <a:spLocks noGrp="1" noRot="1" noChangeAspect="1"/>
           </p:cNvSpPr>
@@ -1895,7 +1900,7 @@
       </p:sp>
       <p:sp>
         <p:nvSpPr>
-          <p:cNvPr id="217" name="Google Shape;217;p22:notes"/>
+          <p:cNvPr id="221" name="Google Shape;221;p22:notes"/>
           <p:cNvSpPr txBox="1">
             <a:spLocks noGrp="1"/>
           </p:cNvSpPr>
@@ -1952,7 +1957,7 @@
   <p:cSld>
     <p:spTree>
       <p:nvGrpSpPr>
-        <p:cNvPr id="1" name="Shape 225"/>
+        <p:cNvPr id="1" name="Shape 229"/>
         <p:cNvGrpSpPr/>
         <p:nvPr/>
       </p:nvGrpSpPr>
@@ -1966,7 +1971,7 @@
       </p:grpSpPr>
       <p:sp>
         <p:nvSpPr>
-          <p:cNvPr id="226" name="Google Shape;226;p23:notes"/>
+          <p:cNvPr id="230" name="Google Shape;230;p23:notes"/>
           <p:cNvSpPr>
             <a:spLocks noGrp="1" noRot="1" noChangeAspect="1"/>
           </p:cNvSpPr>
@@ -2017,7 +2022,7 @@
       </p:sp>
       <p:sp>
         <p:nvSpPr>
-          <p:cNvPr id="227" name="Google Shape;227;p23:notes"/>
+          <p:cNvPr id="231" name="Google Shape;231;p23:notes"/>
           <p:cNvSpPr txBox="1">
             <a:spLocks noGrp="1"/>
           </p:cNvSpPr>
@@ -2318,7 +2323,7 @@
   <p:cSld>
     <p:spTree>
       <p:nvGrpSpPr>
-        <p:cNvPr id="1" name="Shape 82"/>
+        <p:cNvPr id="1" name="Shape 83"/>
         <p:cNvGrpSpPr/>
         <p:nvPr/>
       </p:nvGrpSpPr>
@@ -2332,7 +2337,7 @@
       </p:grpSpPr>
       <p:sp>
         <p:nvSpPr>
-          <p:cNvPr id="83" name="Google Shape;83;p20:notes"/>
+          <p:cNvPr id="84" name="Google Shape;84;p20:notes"/>
           <p:cNvSpPr>
             <a:spLocks noGrp="1" noRot="1" noChangeAspect="1"/>
           </p:cNvSpPr>
@@ -2383,7 +2388,7 @@
       </p:sp>
       <p:sp>
         <p:nvSpPr>
-          <p:cNvPr id="84" name="Google Shape;84;p20:notes"/>
+          <p:cNvPr id="85" name="Google Shape;85;p20:notes"/>
           <p:cNvSpPr txBox="1">
             <a:spLocks noGrp="1"/>
           </p:cNvSpPr>
@@ -2440,7 +2445,7 @@
   <p:cSld>
     <p:spTree>
       <p:nvGrpSpPr>
-        <p:cNvPr id="1" name="Shape 106"/>
+        <p:cNvPr id="1" name="Shape 107"/>
         <p:cNvGrpSpPr/>
         <p:nvPr/>
       </p:nvGrpSpPr>
@@ -2454,7 +2459,7 @@
       </p:grpSpPr>
       <p:sp>
         <p:nvSpPr>
-          <p:cNvPr id="107" name="Google Shape;107;g2cd95e3988b_0_3:notes"/>
+          <p:cNvPr id="108" name="Google Shape;108;g2cd95e3988b_0_3:notes"/>
           <p:cNvSpPr>
             <a:spLocks noGrp="1" noRot="1" noChangeAspect="1"/>
           </p:cNvSpPr>
@@ -2505,7 +2510,7 @@
       </p:sp>
       <p:sp>
         <p:nvSpPr>
-          <p:cNvPr id="108" name="Google Shape;108;g2cd95e3988b_0_3:notes"/>
+          <p:cNvPr id="109" name="Google Shape;109;g2cd95e3988b_0_3:notes"/>
           <p:cNvSpPr txBox="1">
             <a:spLocks noGrp="1"/>
           </p:cNvSpPr>
@@ -2562,7 +2567,7 @@
   <p:cSld>
     <p:spTree>
       <p:nvGrpSpPr>
-        <p:cNvPr id="1" name="Shape 113"/>
+        <p:cNvPr id="1" name="Shape 115"/>
         <p:cNvGrpSpPr/>
         <p:nvPr/>
       </p:nvGrpSpPr>
@@ -2576,7 +2581,7 @@
       </p:grpSpPr>
       <p:sp>
         <p:nvSpPr>
-          <p:cNvPr id="114" name="Google Shape;114;g1f7f7cda57c_1_24:notes"/>
+          <p:cNvPr id="116" name="Google Shape;116;g1f7f7cda57c_1_24:notes"/>
           <p:cNvSpPr>
             <a:spLocks noGrp="1" noRot="1" noChangeAspect="1"/>
           </p:cNvSpPr>
@@ -2627,7 +2632,7 @@
       </p:sp>
       <p:sp>
         <p:nvSpPr>
-          <p:cNvPr id="115" name="Google Shape;115;g1f7f7cda57c_1_24:notes"/>
+          <p:cNvPr id="117" name="Google Shape;117;g1f7f7cda57c_1_24:notes"/>
           <p:cNvSpPr txBox="1">
             <a:spLocks noGrp="1"/>
           </p:cNvSpPr>
@@ -2684,7 +2689,7 @@
   <p:cSld>
     <p:spTree>
       <p:nvGrpSpPr>
-        <p:cNvPr id="1" name="Shape 121"/>
+        <p:cNvPr id="1" name="Shape 123"/>
         <p:cNvGrpSpPr/>
         <p:nvPr/>
       </p:nvGrpSpPr>
@@ -2698,7 +2703,7 @@
       </p:grpSpPr>
       <p:sp>
         <p:nvSpPr>
-          <p:cNvPr id="122" name="Google Shape;122;g1f7f7cda57c_1_15:notes"/>
+          <p:cNvPr id="124" name="Google Shape;124;g1f7f7cda57c_1_15:notes"/>
           <p:cNvSpPr>
             <a:spLocks noGrp="1" noRot="1" noChangeAspect="1"/>
           </p:cNvSpPr>
@@ -2749,7 +2754,7 @@
       </p:sp>
       <p:sp>
         <p:nvSpPr>
-          <p:cNvPr id="123" name="Google Shape;123;g1f7f7cda57c_1_15:notes"/>
+          <p:cNvPr id="125" name="Google Shape;125;g1f7f7cda57c_1_15:notes"/>
           <p:cNvSpPr txBox="1">
             <a:spLocks noGrp="1"/>
           </p:cNvSpPr>
@@ -2806,7 +2811,7 @@
   <p:cSld>
     <p:spTree>
       <p:nvGrpSpPr>
-        <p:cNvPr id="1" name="Shape 131"/>
+        <p:cNvPr id="1" name="Shape 133"/>
         <p:cNvGrpSpPr/>
         <p:nvPr/>
       </p:nvGrpSpPr>
@@ -2820,7 +2825,7 @@
       </p:grpSpPr>
       <p:sp>
         <p:nvSpPr>
-          <p:cNvPr id="132" name="Google Shape;132;g1f7f7cda57c_1_31:notes"/>
+          <p:cNvPr id="134" name="Google Shape;134;g1f7f7cda57c_1_31:notes"/>
           <p:cNvSpPr>
             <a:spLocks noGrp="1" noRot="1" noChangeAspect="1"/>
           </p:cNvSpPr>
@@ -2871,7 +2876,7 @@
       </p:sp>
       <p:sp>
         <p:nvSpPr>
-          <p:cNvPr id="133" name="Google Shape;133;g1f7f7cda57c_1_31:notes"/>
+          <p:cNvPr id="135" name="Google Shape;135;g1f7f7cda57c_1_31:notes"/>
           <p:cNvSpPr txBox="1">
             <a:spLocks noGrp="1"/>
           </p:cNvSpPr>
@@ -2928,7 +2933,7 @@
   <p:cSld>
     <p:spTree>
       <p:nvGrpSpPr>
-        <p:cNvPr id="1" name="Shape 138"/>
+        <p:cNvPr id="1" name="Shape 140"/>
         <p:cNvGrpSpPr/>
         <p:nvPr/>
       </p:nvGrpSpPr>
@@ -2942,7 +2947,7 @@
       </p:grpSpPr>
       <p:sp>
         <p:nvSpPr>
-          <p:cNvPr id="139" name="Google Shape;139;g1f7f7cda57c_0_3:notes"/>
+          <p:cNvPr id="141" name="Google Shape;141;g1f7f7cda57c_0_3:notes"/>
           <p:cNvSpPr>
             <a:spLocks noGrp="1" noRot="1" noChangeAspect="1"/>
           </p:cNvSpPr>
@@ -2993,7 +2998,7 @@
       </p:sp>
       <p:sp>
         <p:nvSpPr>
-          <p:cNvPr id="140" name="Google Shape;140;g1f7f7cda57c_0_3:notes"/>
+          <p:cNvPr id="142" name="Google Shape;142;g1f7f7cda57c_0_3:notes"/>
           <p:cNvSpPr txBox="1">
             <a:spLocks noGrp="1"/>
           </p:cNvSpPr>
@@ -12252,7 +12257,7 @@
   <p:cSld>
     <p:spTree>
       <p:nvGrpSpPr>
-        <p:cNvPr id="1" name="Shape 150"/>
+        <p:cNvPr id="1" name="Shape 152"/>
         <p:cNvGrpSpPr/>
         <p:nvPr/>
       </p:nvGrpSpPr>
@@ -12266,7 +12271,7 @@
       </p:grpSpPr>
       <p:sp>
         <p:nvSpPr>
-          <p:cNvPr id="151" name="Google Shape;151;p23"/>
+          <p:cNvPr id="153" name="Google Shape;153;p23"/>
           <p:cNvSpPr txBox="1"/>
           <p:nvPr/>
         </p:nvSpPr>
@@ -12535,7 +12540,7 @@
       </p:sp>
       <p:sp>
         <p:nvSpPr>
-          <p:cNvPr id="152" name="Google Shape;152;p23"/>
+          <p:cNvPr id="154" name="Google Shape;154;p23"/>
           <p:cNvSpPr txBox="1"/>
           <p:nvPr/>
         </p:nvSpPr>
@@ -12593,7 +12598,7 @@
       </p:sp>
       <p:sp>
         <p:nvSpPr>
-          <p:cNvPr id="153" name="Google Shape;153;p23"/>
+          <p:cNvPr id="155" name="Google Shape;155;p23"/>
           <p:cNvSpPr txBox="1"/>
           <p:nvPr/>
         </p:nvSpPr>
@@ -12668,7 +12673,7 @@
       </p:sp>
       <p:sp>
         <p:nvSpPr>
-          <p:cNvPr id="154" name="Google Shape;154;p23"/>
+          <p:cNvPr id="156" name="Google Shape;156;p23"/>
           <p:cNvSpPr txBox="1"/>
           <p:nvPr/>
         </p:nvSpPr>
@@ -12840,7 +12845,7 @@
       </p:sp>
       <p:sp>
         <p:nvSpPr>
-          <p:cNvPr id="155" name="Google Shape;155;p23"/>
+          <p:cNvPr id="157" name="Google Shape;157;p23"/>
           <p:cNvSpPr txBox="1"/>
           <p:nvPr/>
         </p:nvSpPr>
@@ -13112,7 +13117,7 @@
       </p:sp>
       <p:sp>
         <p:nvSpPr>
-          <p:cNvPr id="156" name="Google Shape;156;p23"/>
+          <p:cNvPr id="158" name="Google Shape;158;p23"/>
           <p:cNvSpPr txBox="1"/>
           <p:nvPr/>
         </p:nvSpPr>
@@ -13187,7 +13192,7 @@
       </p:sp>
       <p:sp>
         <p:nvSpPr>
-          <p:cNvPr id="157" name="Google Shape;157;p23"/>
+          <p:cNvPr id="159" name="Google Shape;159;p23"/>
           <p:cNvSpPr txBox="1"/>
           <p:nvPr/>
         </p:nvSpPr>
@@ -13253,7 +13258,7 @@
       </p:sp>
       <p:pic>
         <p:nvPicPr>
-          <p:cNvPr id="158" name="Google Shape;158;p23"/>
+          <p:cNvPr id="160" name="Google Shape;160;p23"/>
           <p:cNvPicPr preferRelativeResize="0"/>
           <p:nvPr/>
         </p:nvPicPr>
@@ -13281,7 +13286,7 @@
       </p:pic>
       <p:pic>
         <p:nvPicPr>
-          <p:cNvPr id="159" name="Google Shape;159;p23"/>
+          <p:cNvPr id="161" name="Google Shape;161;p23"/>
           <p:cNvPicPr preferRelativeResize="0"/>
           <p:nvPr/>
         </p:nvPicPr>
@@ -13314,7 +13319,7 @@
       </p:pic>
       <p:sp>
         <p:nvSpPr>
-          <p:cNvPr id="160" name="Google Shape;160;p23"/>
+          <p:cNvPr id="162" name="Google Shape;162;p23"/>
           <p:cNvSpPr txBox="1"/>
           <p:nvPr/>
         </p:nvSpPr>
@@ -13481,7 +13486,7 @@
   <p:cSld>
     <p:spTree>
       <p:nvGrpSpPr>
-        <p:cNvPr id="1" name="Shape 164"/>
+        <p:cNvPr id="1" name="Shape 166"/>
         <p:cNvGrpSpPr/>
         <p:nvPr/>
       </p:nvGrpSpPr>
@@ -13495,7 +13500,7 @@
       </p:grpSpPr>
       <p:sp>
         <p:nvSpPr>
-          <p:cNvPr id="165" name="Google Shape;165;p24"/>
+          <p:cNvPr id="167" name="Google Shape;167;p24"/>
           <p:cNvSpPr txBox="1"/>
           <p:nvPr/>
         </p:nvSpPr>
@@ -13615,7 +13620,7 @@
       </p:sp>
       <p:sp>
         <p:nvSpPr>
-          <p:cNvPr id="166" name="Google Shape;166;p24"/>
+          <p:cNvPr id="168" name="Google Shape;168;p24"/>
           <p:cNvSpPr txBox="1"/>
           <p:nvPr/>
         </p:nvSpPr>
@@ -13673,7 +13678,7 @@
       </p:sp>
       <p:pic>
         <p:nvPicPr>
-          <p:cNvPr id="167" name="Google Shape;167;p24"/>
+          <p:cNvPr id="169" name="Google Shape;169;p24"/>
           <p:cNvPicPr preferRelativeResize="0"/>
           <p:nvPr/>
         </p:nvPicPr>
@@ -13712,7 +13717,7 @@
       </p:pic>
       <p:sp>
         <p:nvSpPr>
-          <p:cNvPr id="168" name="Google Shape;168;p24"/>
+          <p:cNvPr id="170" name="Google Shape;170;p24"/>
           <p:cNvSpPr txBox="1"/>
           <p:nvPr/>
         </p:nvSpPr>
@@ -13848,7 +13853,7 @@
       </p:sp>
       <p:pic>
         <p:nvPicPr>
-          <p:cNvPr id="169" name="Google Shape;169;p24"/>
+          <p:cNvPr id="171" name="Google Shape;171;p24"/>
           <p:cNvPicPr preferRelativeResize="0"/>
           <p:nvPr/>
         </p:nvPicPr>
@@ -13881,7 +13886,7 @@
       </p:pic>
       <p:pic>
         <p:nvPicPr>
-          <p:cNvPr id="170" name="Google Shape;170;p24"/>
+          <p:cNvPr id="172" name="Google Shape;172;p24"/>
           <p:cNvPicPr preferRelativeResize="0"/>
           <p:nvPr/>
         </p:nvPicPr>
@@ -13925,7 +13930,7 @@
   <p:cSld>
     <p:spTree>
       <p:nvGrpSpPr>
-        <p:cNvPr id="1" name="Shape 174"/>
+        <p:cNvPr id="1" name="Shape 176"/>
         <p:cNvGrpSpPr/>
         <p:nvPr/>
       </p:nvGrpSpPr>
@@ -13939,7 +13944,7 @@
       </p:grpSpPr>
       <p:sp>
         <p:nvSpPr>
-          <p:cNvPr id="175" name="Google Shape;175;p25"/>
+          <p:cNvPr id="177" name="Google Shape;177;p25"/>
           <p:cNvSpPr txBox="1"/>
           <p:nvPr/>
         </p:nvSpPr>
@@ -14014,7 +14019,7 @@
       </p:sp>
       <p:sp>
         <p:nvSpPr>
-          <p:cNvPr id="176" name="Google Shape;176;p25"/>
+          <p:cNvPr id="178" name="Google Shape;178;p25"/>
           <p:cNvSpPr txBox="1"/>
           <p:nvPr/>
         </p:nvSpPr>
@@ -14072,7 +14077,7 @@
       </p:sp>
       <p:sp>
         <p:nvSpPr>
-          <p:cNvPr id="177" name="Google Shape;177;p25"/>
+          <p:cNvPr id="179" name="Google Shape;179;p25"/>
           <p:cNvSpPr txBox="1"/>
           <p:nvPr/>
         </p:nvSpPr>
@@ -14241,7 +14246,7 @@
       </p:sp>
       <p:sp>
         <p:nvSpPr>
-          <p:cNvPr id="178" name="Google Shape;178;p25"/>
+          <p:cNvPr id="180" name="Google Shape;180;p25"/>
           <p:cNvSpPr txBox="1"/>
           <p:nvPr/>
         </p:nvSpPr>
@@ -14356,7 +14361,7 @@
       </p:sp>
       <p:sp>
         <p:nvSpPr>
-          <p:cNvPr id="179" name="Google Shape;179;p25"/>
+          <p:cNvPr id="181" name="Google Shape;181;p25"/>
           <p:cNvSpPr txBox="1"/>
           <p:nvPr/>
         </p:nvSpPr>
@@ -14428,7 +14433,7 @@
       </p:sp>
       <p:sp>
         <p:nvSpPr>
-          <p:cNvPr id="180" name="Google Shape;180;p25"/>
+          <p:cNvPr id="182" name="Google Shape;182;p25"/>
           <p:cNvSpPr txBox="1"/>
           <p:nvPr/>
         </p:nvSpPr>
@@ -14563,6 +14568,151 @@
           </a:p>
         </p:txBody>
       </p:sp>
+      <p:sp>
+        <p:nvSpPr>
+          <p:cNvPr id="183" name="Google Shape;183;p25"/>
+          <p:cNvSpPr txBox="1"/>
+          <p:nvPr/>
+        </p:nvSpPr>
+        <p:spPr>
+          <a:xfrm>
+            <a:off x="4625450" y="2702225"/>
+            <a:ext cx="4432200" cy="1009800"/>
+          </a:xfrm>
+          <a:prstGeom prst="rect">
+            <a:avLst/>
+          </a:prstGeom>
+          <a:solidFill>
+            <a:srgbClr val="FFF2CC"/>
+          </a:solidFill>
+          <a:ln w="9525" cap="flat" cmpd="sng">
+            <a:solidFill>
+              <a:srgbClr val="FF0000"/>
+            </a:solidFill>
+            <a:prstDash val="solid"/>
+            <a:round/>
+            <a:headEnd type="none" w="sm" len="sm"/>
+            <a:tailEnd type="none" w="sm" len="sm"/>
+          </a:ln>
+        </p:spPr>
+        <p:txBody>
+          <a:bodyPr spcFirstLastPara="1" wrap="square" lIns="27425" tIns="27425" rIns="27425" bIns="27425" anchor="t" anchorCtr="0">
+            <a:spAutoFit/>
+          </a:bodyPr>
+          <a:lstStyle/>
+          <a:p>
+            <a:pPr marL="0" lvl="0" indent="0" algn="l" rtl="0">
+              <a:spcBef>
+                <a:spcPts val="0"/>
+              </a:spcBef>
+              <a:spcAft>
+                <a:spcPts val="0"/>
+              </a:spcAft>
+              <a:buClr>
+                <a:schemeClr val="dk1"/>
+              </a:buClr>
+              <a:buSzPts val="1100"/>
+              <a:buFont typeface="Arial"/>
+              <a:buNone/>
+            </a:pPr>
+            <a:r>
+              <a:rPr lang="en" sz="1300" b="1">
+                <a:solidFill>
+                  <a:srgbClr val="FF0000"/>
+                </a:solidFill>
+                <a:latin typeface="Calibri"/>
+                <a:ea typeface="Calibri"/>
+                <a:cs typeface="Calibri"/>
+                <a:sym typeface="Calibri"/>
+              </a:rPr>
+              <a:t>Rabbit R1</a:t>
+            </a:r>
+            <a:r>
+              <a:rPr lang="en" sz="1300">
+                <a:latin typeface="Calibri"/>
+                <a:ea typeface="Calibri"/>
+                <a:cs typeface="Calibri"/>
+                <a:sym typeface="Calibri"/>
+              </a:rPr>
+              <a:t> is out. It weighs 115 grams, which is about two-thirds as much as the iPhone 15. It has a 2.88-inch screen, has 128 GB of storage and four Gs of RAM. It has a speaker, two mics, a SIM card slot and a USB-C charging port. </a:t>
+            </a:r>
+            <a:endParaRPr sz="1300">
+              <a:latin typeface="Calibri"/>
+              <a:ea typeface="Calibri"/>
+              <a:cs typeface="Calibri"/>
+              <a:sym typeface="Calibri"/>
+            </a:endParaRPr>
+          </a:p>
+          <a:p>
+            <a:pPr marL="0" lvl="0" indent="0" algn="l" rtl="0">
+              <a:spcBef>
+                <a:spcPts val="0"/>
+              </a:spcBef>
+              <a:spcAft>
+                <a:spcPts val="0"/>
+              </a:spcAft>
+              <a:buClr>
+                <a:schemeClr val="dk1"/>
+              </a:buClr>
+              <a:buSzPts val="1100"/>
+              <a:buFont typeface="Arial"/>
+              <a:buNone/>
+            </a:pPr>
+            <a:r>
+              <a:rPr lang="en" sz="1000" u="sng">
+                <a:solidFill>
+                  <a:schemeClr val="hlink"/>
+                </a:solidFill>
+                <a:latin typeface="Calibri"/>
+                <a:ea typeface="Calibri"/>
+                <a:cs typeface="Calibri"/>
+                <a:sym typeface="Calibri"/>
+                <a:hlinkClick r:id="rId6"/>
+              </a:rPr>
+              <a:t>https://www.theverge.com/24138746/rabbit-r1-hands-on-ai-gadget-chatgpt</a:t>
+            </a:r>
+            <a:endParaRPr sz="1300">
+              <a:latin typeface="Calibri"/>
+              <a:ea typeface="Calibri"/>
+              <a:cs typeface="Calibri"/>
+              <a:sym typeface="Calibri"/>
+            </a:endParaRPr>
+          </a:p>
+        </p:txBody>
+      </p:sp>
+      <p:pic>
+        <p:nvPicPr>
+          <p:cNvPr id="184" name="Google Shape;184;p25"/>
+          <p:cNvPicPr preferRelativeResize="0"/>
+          <p:nvPr/>
+        </p:nvPicPr>
+        <p:blipFill>
+          <a:blip r:embed="rId7" cstate="email">
+            <a:alphaModFix/>
+            <a:extLst>
+              <a:ext uri="{28A0092B-C50C-407E-A947-70E740481C1C}">
+                <a14:useLocalDpi xmlns:a14="http://schemas.microsoft.com/office/drawing/2010/main"/>
+              </a:ext>
+            </a:extLst>
+          </a:blip>
+          <a:stretch>
+            <a:fillRect/>
+          </a:stretch>
+        </p:blipFill>
+        <p:spPr>
+          <a:xfrm>
+            <a:off x="5923139" y="3803579"/>
+            <a:ext cx="1836824" cy="1224550"/>
+          </a:xfrm>
+          <a:prstGeom prst="rect">
+            <a:avLst/>
+          </a:prstGeom>
+          <a:noFill/>
+          <a:ln>
+            <a:noFill/>
+          </a:ln>
+        </p:spPr>
+      </p:pic>
     </p:spTree>
   </p:cSld>
   <p:clrMapOvr>
@@ -14576,7 +14726,7 @@
   <p:cSld>
     <p:spTree>
       <p:nvGrpSpPr>
-        <p:cNvPr id="1" name="Shape 184"/>
+        <p:cNvPr id="1" name="Shape 188"/>
         <p:cNvGrpSpPr/>
         <p:nvPr/>
       </p:nvGrpSpPr>
@@ -14590,7 +14740,7 @@
       </p:grpSpPr>
       <p:sp>
         <p:nvSpPr>
-          <p:cNvPr id="185" name="Google Shape;185;p26"/>
+          <p:cNvPr id="189" name="Google Shape;189;p26"/>
           <p:cNvSpPr txBox="1"/>
           <p:nvPr/>
         </p:nvSpPr>
@@ -14688,7 +14838,7 @@
       </p:sp>
       <p:sp>
         <p:nvSpPr>
-          <p:cNvPr id="186" name="Google Shape;186;p26"/>
+          <p:cNvPr id="190" name="Google Shape;190;p26"/>
           <p:cNvSpPr txBox="1"/>
           <p:nvPr/>
         </p:nvSpPr>
@@ -14746,7 +14896,7 @@
       </p:sp>
       <p:pic>
         <p:nvPicPr>
-          <p:cNvPr id="187" name="Google Shape;187;p26"/>
+          <p:cNvPr id="191" name="Google Shape;191;p26"/>
           <p:cNvPicPr preferRelativeResize="0"/>
           <p:nvPr/>
         </p:nvPicPr>
@@ -14779,7 +14929,7 @@
       </p:pic>
       <p:sp>
         <p:nvSpPr>
-          <p:cNvPr id="188" name="Google Shape;188;p26"/>
+          <p:cNvPr id="192" name="Google Shape;192;p26"/>
           <p:cNvSpPr txBox="1"/>
           <p:nvPr/>
         </p:nvSpPr>
@@ -15025,7 +15175,7 @@
   <p:cSld>
     <p:spTree>
       <p:nvGrpSpPr>
-        <p:cNvPr id="1" name="Shape 192"/>
+        <p:cNvPr id="1" name="Shape 196"/>
         <p:cNvGrpSpPr/>
         <p:nvPr/>
       </p:nvGrpSpPr>
@@ -15039,7 +15189,7 @@
       </p:grpSpPr>
       <p:sp>
         <p:nvSpPr>
-          <p:cNvPr id="193" name="Google Shape;193;p27"/>
+          <p:cNvPr id="197" name="Google Shape;197;p27"/>
           <p:cNvSpPr txBox="1"/>
           <p:nvPr/>
         </p:nvSpPr>
@@ -15334,7 +15484,7 @@
       </p:sp>
       <p:pic>
         <p:nvPicPr>
-          <p:cNvPr id="194" name="Google Shape;194;p27"/>
+          <p:cNvPr id="198" name="Google Shape;198;p27"/>
           <p:cNvPicPr preferRelativeResize="0"/>
           <p:nvPr/>
         </p:nvPicPr>
@@ -15367,7 +15517,7 @@
       </p:pic>
       <p:sp>
         <p:nvSpPr>
-          <p:cNvPr id="195" name="Google Shape;195;p27"/>
+          <p:cNvPr id="199" name="Google Shape;199;p27"/>
           <p:cNvSpPr txBox="1"/>
           <p:nvPr/>
         </p:nvSpPr>
@@ -15436,7 +15586,7 @@
   <p:cSld>
     <p:spTree>
       <p:nvGrpSpPr>
-        <p:cNvPr id="1" name="Shape 199"/>
+        <p:cNvPr id="1" name="Shape 203"/>
         <p:cNvGrpSpPr/>
         <p:nvPr/>
       </p:nvGrpSpPr>
@@ -15450,7 +15600,7 @@
       </p:grpSpPr>
       <p:sp>
         <p:nvSpPr>
-          <p:cNvPr id="200" name="Google Shape;200;p28"/>
+          <p:cNvPr id="204" name="Google Shape;204;p28"/>
           <p:cNvSpPr txBox="1"/>
           <p:nvPr/>
         </p:nvSpPr>
@@ -15508,7 +15658,7 @@
       </p:sp>
       <p:sp>
         <p:nvSpPr>
-          <p:cNvPr id="201" name="Google Shape;201;p28"/>
+          <p:cNvPr id="205" name="Google Shape;205;p28"/>
           <p:cNvSpPr txBox="1"/>
           <p:nvPr/>
         </p:nvSpPr>
@@ -16195,7 +16345,7 @@
       </p:sp>
       <p:pic>
         <p:nvPicPr>
-          <p:cNvPr id="202" name="Google Shape;202;p28"/>
+          <p:cNvPr id="206" name="Google Shape;206;p28"/>
           <p:cNvPicPr preferRelativeResize="0"/>
           <p:nvPr/>
         </p:nvPicPr>
@@ -16228,7 +16378,7 @@
       </p:pic>
       <p:sp>
         <p:nvSpPr>
-          <p:cNvPr id="203" name="Google Shape;203;p28"/>
+          <p:cNvPr id="207" name="Google Shape;207;p28"/>
           <p:cNvSpPr txBox="1"/>
           <p:nvPr/>
         </p:nvSpPr>
@@ -16294,7 +16444,7 @@
       </p:sp>
       <p:sp>
         <p:nvSpPr>
-          <p:cNvPr id="204" name="Google Shape;204;p28"/>
+          <p:cNvPr id="208" name="Google Shape;208;p28"/>
           <p:cNvSpPr txBox="1"/>
           <p:nvPr/>
         </p:nvSpPr>
@@ -16421,7 +16571,7 @@
   <p:cSld>
     <p:spTree>
       <p:nvGrpSpPr>
-        <p:cNvPr id="1" name="Shape 208"/>
+        <p:cNvPr id="1" name="Shape 212"/>
         <p:cNvGrpSpPr/>
         <p:nvPr/>
       </p:nvGrpSpPr>
@@ -16435,7 +16585,7 @@
       </p:grpSpPr>
       <p:pic>
         <p:nvPicPr>
-          <p:cNvPr id="209" name="Google Shape;209;p29"/>
+          <p:cNvPr id="213" name="Google Shape;213;p29"/>
           <p:cNvPicPr preferRelativeResize="0"/>
           <p:nvPr/>
         </p:nvPicPr>
@@ -16468,7 +16618,7 @@
       </p:pic>
       <p:sp>
         <p:nvSpPr>
-          <p:cNvPr id="210" name="Google Shape;210;p29"/>
+          <p:cNvPr id="214" name="Google Shape;214;p29"/>
           <p:cNvSpPr txBox="1"/>
           <p:nvPr/>
         </p:nvSpPr>
@@ -16558,7 +16708,7 @@
       </p:sp>
       <p:sp>
         <p:nvSpPr>
-          <p:cNvPr id="211" name="Google Shape;211;p29"/>
+          <p:cNvPr id="215" name="Google Shape;215;p29"/>
           <p:cNvSpPr txBox="1"/>
           <p:nvPr/>
         </p:nvSpPr>
@@ -16649,7 +16799,7 @@
       </p:sp>
       <p:sp>
         <p:nvSpPr>
-          <p:cNvPr id="212" name="Google Shape;212;p29"/>
+          <p:cNvPr id="216" name="Google Shape;216;p29"/>
           <p:cNvSpPr txBox="1"/>
           <p:nvPr/>
         </p:nvSpPr>
@@ -16857,7 +17007,7 @@
       </p:sp>
       <p:sp>
         <p:nvSpPr>
-          <p:cNvPr id="213" name="Google Shape;213;p29"/>
+          <p:cNvPr id="217" name="Google Shape;217;p29"/>
           <p:cNvSpPr/>
           <p:nvPr/>
         </p:nvSpPr>
@@ -16901,7 +17051,7 @@
       </p:sp>
       <p:sp>
         <p:nvSpPr>
-          <p:cNvPr id="214" name="Google Shape;214;p29"/>
+          <p:cNvPr id="218" name="Google Shape;218;p29"/>
           <p:cNvSpPr/>
           <p:nvPr/>
         </p:nvSpPr>
@@ -16956,7 +17106,7 @@
   <p:cSld>
     <p:spTree>
       <p:nvGrpSpPr>
-        <p:cNvPr id="1" name="Shape 218"/>
+        <p:cNvPr id="1" name="Shape 222"/>
         <p:cNvGrpSpPr/>
         <p:nvPr/>
       </p:nvGrpSpPr>
@@ -16970,7 +17120,7 @@
       </p:grpSpPr>
       <p:pic>
         <p:nvPicPr>
-          <p:cNvPr id="219" name="Google Shape;219;p30"/>
+          <p:cNvPr id="223" name="Google Shape;223;p30"/>
           <p:cNvPicPr preferRelativeResize="0"/>
           <p:nvPr/>
         </p:nvPicPr>
@@ -16997,7 +17147,7 @@
       </p:pic>
       <p:sp>
         <p:nvSpPr>
-          <p:cNvPr id="220" name="Google Shape;220;p30"/>
+          <p:cNvPr id="224" name="Google Shape;224;p30"/>
           <p:cNvSpPr txBox="1"/>
           <p:nvPr/>
         </p:nvSpPr>
@@ -17063,7 +17213,7 @@
       </p:sp>
       <p:sp>
         <p:nvSpPr>
-          <p:cNvPr id="221" name="Google Shape;221;p30"/>
+          <p:cNvPr id="225" name="Google Shape;225;p30"/>
           <p:cNvSpPr txBox="1"/>
           <p:nvPr/>
         </p:nvSpPr>
@@ -17493,7 +17643,7 @@
       </p:sp>
       <p:pic>
         <p:nvPicPr>
-          <p:cNvPr id="222" name="Google Shape;222;p30"/>
+          <p:cNvPr id="226" name="Google Shape;226;p30"/>
           <p:cNvPicPr preferRelativeResize="0"/>
           <p:nvPr/>
         </p:nvPicPr>
@@ -17525,7 +17675,7 @@
       </p:pic>
       <p:sp>
         <p:nvSpPr>
-          <p:cNvPr id="223" name="Google Shape;223;p30"/>
+          <p:cNvPr id="227" name="Google Shape;227;p30"/>
           <p:cNvSpPr txBox="1"/>
           <p:nvPr/>
         </p:nvSpPr>
@@ -17604,7 +17754,7 @@
       </p:sp>
       <p:sp>
         <p:nvSpPr>
-          <p:cNvPr id="224" name="Google Shape;224;p30"/>
+          <p:cNvPr id="228" name="Google Shape;228;p30"/>
           <p:cNvSpPr txBox="1"/>
           <p:nvPr/>
         </p:nvSpPr>
@@ -17681,7 +17831,7 @@
   <p:cSld>
     <p:spTree>
       <p:nvGrpSpPr>
-        <p:cNvPr id="1" name="Shape 228"/>
+        <p:cNvPr id="1" name="Shape 232"/>
         <p:cNvGrpSpPr/>
         <p:nvPr/>
       </p:nvGrpSpPr>
@@ -17695,7 +17845,7 @@
       </p:grpSpPr>
       <p:sp>
         <p:nvSpPr>
-          <p:cNvPr id="229" name="Google Shape;229;p31"/>
+          <p:cNvPr id="233" name="Google Shape;233;p31"/>
           <p:cNvSpPr txBox="1"/>
           <p:nvPr/>
         </p:nvSpPr>
@@ -18151,7 +18301,7 @@
         <p:spPr>
           <a:xfrm>
             <a:off x="76200" y="423325"/>
-            <a:ext cx="4383300" cy="1533000"/>
+            <a:ext cx="4383300" cy="1163700"/>
           </a:xfrm>
           <a:prstGeom prst="rect">
             <a:avLst/>
@@ -18253,26 +18403,6 @@
               </a:spcAft>
               <a:buNone/>
             </a:pPr>
-            <a:endParaRPr sz="1200">
-              <a:solidFill>
-                <a:schemeClr val="dk1"/>
-              </a:solidFill>
-              <a:latin typeface="Calibri"/>
-              <a:ea typeface="Calibri"/>
-              <a:cs typeface="Calibri"/>
-              <a:sym typeface="Calibri"/>
-            </a:endParaRPr>
-          </a:p>
-          <a:p>
-            <a:pPr marL="0" lvl="0" indent="0" algn="l" rtl="0">
-              <a:spcBef>
-                <a:spcPts val="0"/>
-              </a:spcBef>
-              <a:spcAft>
-                <a:spcPts val="0"/>
-              </a:spcAft>
-              <a:buNone/>
-            </a:pPr>
             <a:r>
               <a:rPr lang="en" sz="1200">
                 <a:solidFill>
@@ -18283,39 +18413,7 @@
                 <a:cs typeface="Calibri"/>
                 <a:sym typeface="Calibri"/>
               </a:rPr>
-              <a:t>If you need to update ollama on a Mac, first stop it by running this command: </a:t>
-            </a:r>
-            <a:endParaRPr sz="1200">
-              <a:solidFill>
-                <a:schemeClr val="dk1"/>
-              </a:solidFill>
-              <a:latin typeface="Calibri"/>
-              <a:ea typeface="Calibri"/>
-              <a:cs typeface="Calibri"/>
-              <a:sym typeface="Calibri"/>
-            </a:endParaRPr>
-          </a:p>
-          <a:p>
-            <a:pPr marL="0" lvl="0" indent="0" algn="l" rtl="0">
-              <a:spcBef>
-                <a:spcPts val="0"/>
-              </a:spcBef>
-              <a:spcAft>
-                <a:spcPts val="0"/>
-              </a:spcAft>
-              <a:buNone/>
-            </a:pPr>
-            <a:r>
-              <a:rPr lang="en" sz="1200">
-                <a:solidFill>
-                  <a:schemeClr val="dk1"/>
-                </a:solidFill>
-                <a:latin typeface="Calibri"/>
-                <a:ea typeface="Calibri"/>
-                <a:cs typeface="Calibri"/>
-                <a:sym typeface="Calibri"/>
-              </a:rPr>
-              <a:t>    </a:t>
+              <a:t>Note : If you need to update ollama on a Mac, first stop it by running this command:   </a:t>
             </a:r>
             <a:r>
               <a:rPr lang="en" sz="1200">
@@ -18471,7 +18569,7 @@
         </p:nvSpPr>
         <p:spPr>
           <a:xfrm>
-            <a:off x="76200" y="2007950"/>
+            <a:off x="76200" y="2138678"/>
             <a:ext cx="3727200" cy="2118000"/>
           </a:xfrm>
           <a:prstGeom prst="rect">
@@ -18867,7 +18965,7 @@
         </p:blipFill>
         <p:spPr>
           <a:xfrm>
-            <a:off x="3328125" y="2700800"/>
+            <a:off x="3328125" y="2831528"/>
             <a:ext cx="1131374" cy="1131374"/>
           </a:xfrm>
           <a:prstGeom prst="rect">
@@ -19068,7 +19166,7 @@
         </p:nvSpPr>
         <p:spPr>
           <a:xfrm>
-            <a:off x="76200" y="4225076"/>
+            <a:off x="76200" y="4301276"/>
             <a:ext cx="4383300" cy="794100"/>
           </a:xfrm>
           <a:prstGeom prst="rect">
@@ -19173,6 +19271,72 @@
           </a:p>
         </p:txBody>
       </p:sp>
+      <p:sp>
+        <p:nvSpPr>
+          <p:cNvPr id="82" name="Google Shape;82;p16"/>
+          <p:cNvSpPr txBox="1"/>
+          <p:nvPr/>
+        </p:nvSpPr>
+        <p:spPr>
+          <a:xfrm>
+            <a:off x="76200" y="1644817"/>
+            <a:ext cx="4383300" cy="424800"/>
+          </a:xfrm>
+          <a:prstGeom prst="rect">
+            <a:avLst/>
+          </a:prstGeom>
+          <a:solidFill>
+            <a:srgbClr val="FFF2CC"/>
+          </a:solidFill>
+          <a:ln w="9525" cap="flat" cmpd="sng">
+            <a:solidFill>
+              <a:srgbClr val="FF0000"/>
+            </a:solidFill>
+            <a:prstDash val="solid"/>
+            <a:round/>
+            <a:headEnd type="none" w="sm" len="sm"/>
+            <a:tailEnd type="none" w="sm" len="sm"/>
+          </a:ln>
+        </p:spPr>
+        <p:txBody>
+          <a:bodyPr spcFirstLastPara="1" wrap="square" lIns="27425" tIns="27425" rIns="27425" bIns="27425" anchor="t" anchorCtr="0">
+            <a:spAutoFit/>
+          </a:bodyPr>
+          <a:lstStyle/>
+          <a:p>
+            <a:pPr marL="0" lvl="0" indent="0" algn="l" rtl="0">
+              <a:spcBef>
+                <a:spcPts val="0"/>
+              </a:spcBef>
+              <a:spcAft>
+                <a:spcPts val="0"/>
+              </a:spcAft>
+              <a:buNone/>
+            </a:pPr>
+            <a:r>
+              <a:rPr lang="en" sz="1200">
+                <a:solidFill>
+                  <a:schemeClr val="dk1"/>
+                </a:solidFill>
+                <a:latin typeface="Calibri"/>
+                <a:ea typeface="Calibri"/>
+                <a:cs typeface="Calibri"/>
+                <a:sym typeface="Calibri"/>
+              </a:rPr>
+              <a:t>In one week since release, the Llama 3 was downloaded over 1.2M times, and we've seen 600+ derivative models on HuggingFace</a:t>
+            </a:r>
+            <a:endParaRPr sz="1200">
+              <a:solidFill>
+                <a:schemeClr val="dk1"/>
+              </a:solidFill>
+              <a:latin typeface="Calibri"/>
+              <a:ea typeface="Calibri"/>
+              <a:cs typeface="Calibri"/>
+              <a:sym typeface="Calibri"/>
+            </a:endParaRPr>
+          </a:p>
+        </p:txBody>
+      </p:sp>
     </p:spTree>
   </p:cSld>
   <p:clrMapOvr>
@@ -19186,7 +19350,7 @@
   <p:cSld>
     <p:spTree>
       <p:nvGrpSpPr>
-        <p:cNvPr id="1" name="Shape 85"/>
+        <p:cNvPr id="1" name="Shape 86"/>
         <p:cNvGrpSpPr/>
         <p:nvPr/>
       </p:nvGrpSpPr>
@@ -19198,16 +19362,113 @@
           <a:chExt cx="0" cy="0"/>
         </a:xfrm>
       </p:grpSpPr>
+      <p:pic>
+        <p:nvPicPr>
+          <p:cNvPr id="87" name="Google Shape;87;p17"/>
+          <p:cNvPicPr preferRelativeResize="0"/>
+          <p:nvPr/>
+        </p:nvPicPr>
+        <p:blipFill>
+          <a:blip r:embed="rId3" cstate="email">
+            <a:alphaModFix/>
+            <a:extLst>
+              <a:ext uri="{28A0092B-C50C-407E-A947-70E740481C1C}">
+                <a14:useLocalDpi xmlns:a14="http://schemas.microsoft.com/office/drawing/2010/main"/>
+              </a:ext>
+            </a:extLst>
+          </a:blip>
+          <a:stretch>
+            <a:fillRect/>
+          </a:stretch>
+        </p:blipFill>
+        <p:spPr>
+          <a:xfrm>
+            <a:off x="4388509" y="717687"/>
+            <a:ext cx="4151699" cy="2560144"/>
+          </a:xfrm>
+          <a:prstGeom prst="rect">
+            <a:avLst/>
+          </a:prstGeom>
+          <a:noFill/>
+          <a:ln>
+            <a:noFill/>
+          </a:ln>
+        </p:spPr>
+      </p:pic>
+      <p:pic>
+        <p:nvPicPr>
+          <p:cNvPr id="88" name="Google Shape;88;p17"/>
+          <p:cNvPicPr preferRelativeResize="0"/>
+          <p:nvPr/>
+        </p:nvPicPr>
+        <p:blipFill rotWithShape="1">
+          <a:blip r:embed="rId4" cstate="email">
+            <a:alphaModFix/>
+            <a:extLst>
+              <a:ext uri="{28A0092B-C50C-407E-A947-70E740481C1C}">
+                <a14:useLocalDpi xmlns:a14="http://schemas.microsoft.com/office/drawing/2010/main"/>
+              </a:ext>
+            </a:extLst>
+          </a:blip>
+          <a:srcRect/>
+          <a:stretch/>
+        </p:blipFill>
+        <p:spPr>
+          <a:xfrm>
+            <a:off x="70050" y="2814050"/>
+            <a:ext cx="3835248" cy="2242750"/>
+          </a:xfrm>
+          <a:prstGeom prst="rect">
+            <a:avLst/>
+          </a:prstGeom>
+          <a:noFill/>
+          <a:ln>
+            <a:noFill/>
+          </a:ln>
+        </p:spPr>
+      </p:pic>
+      <p:pic>
+        <p:nvPicPr>
+          <p:cNvPr id="89" name="Google Shape;89;p17"/>
+          <p:cNvPicPr preferRelativeResize="0"/>
+          <p:nvPr/>
+        </p:nvPicPr>
+        <p:blipFill rotWithShape="1">
+          <a:blip r:embed="rId5" cstate="email">
+            <a:alphaModFix/>
+            <a:extLst>
+              <a:ext uri="{28A0092B-C50C-407E-A947-70E740481C1C}">
+                <a14:useLocalDpi xmlns:a14="http://schemas.microsoft.com/office/drawing/2010/main"/>
+              </a:ext>
+            </a:extLst>
+          </a:blip>
+          <a:srcRect/>
+          <a:stretch/>
+        </p:blipFill>
+        <p:spPr>
+          <a:xfrm>
+            <a:off x="70050" y="440250"/>
+            <a:ext cx="3835248" cy="2373800"/>
+          </a:xfrm>
+          <a:prstGeom prst="rect">
+            <a:avLst/>
+          </a:prstGeom>
+          <a:noFill/>
+          <a:ln>
+            <a:noFill/>
+          </a:ln>
+        </p:spPr>
+      </p:pic>
       <p:sp>
         <p:nvSpPr>
-          <p:cNvPr id="86" name="Google Shape;86;p17"/>
+          <p:cNvPr id="90" name="Google Shape;90;p17"/>
           <p:cNvSpPr txBox="1"/>
           <p:nvPr/>
         </p:nvSpPr>
         <p:spPr>
           <a:xfrm>
-            <a:off x="4694172" y="52350"/>
-            <a:ext cx="2343900" cy="549600"/>
+            <a:off x="4694174" y="52350"/>
+            <a:ext cx="1908600" cy="526500"/>
           </a:xfrm>
           <a:prstGeom prst="rect">
             <a:avLst/>
@@ -19241,23 +19502,31 @@
               <a:buNone/>
             </a:pPr>
             <a:r>
-              <a:rPr lang="en" sz="1150">
+              <a:rPr lang="en" sz="1100">
                 <a:solidFill>
                   <a:srgbClr val="1F2937"/>
                 </a:solidFill>
                 <a:highlight>
                   <a:srgbClr val="FFFFFF"/>
                 </a:highlight>
-              </a:rPr>
-              <a:t>Total #models: 90.	</a:t>
-            </a:r>
-            <a:endParaRPr sz="1150">
+                <a:latin typeface="Calibri"/>
+                <a:ea typeface="Calibri"/>
+                <a:cs typeface="Calibri"/>
+                <a:sym typeface="Calibri"/>
+              </a:rPr>
+              <a:t>Total #models: 91.    </a:t>
+            </a:r>
+            <a:endParaRPr sz="1100">
               <a:solidFill>
                 <a:srgbClr val="1F2937"/>
               </a:solidFill>
               <a:highlight>
                 <a:srgbClr val="FFFFFF"/>
               </a:highlight>
+              <a:latin typeface="Calibri"/>
+              <a:ea typeface="Calibri"/>
+              <a:cs typeface="Calibri"/>
+              <a:sym typeface="Calibri"/>
             </a:endParaRPr>
           </a:p>
           <a:p>
@@ -19279,23 +19548,31 @@
               <a:buNone/>
             </a:pPr>
             <a:r>
-              <a:rPr lang="en" sz="1150">
+              <a:rPr lang="en" sz="1100">
                 <a:solidFill>
                   <a:srgbClr val="1F2937"/>
                 </a:solidFill>
                 <a:highlight>
                   <a:srgbClr val="FFFFFF"/>
                 </a:highlight>
-              </a:rPr>
-              <a:t>Total #votes: 772,779.	</a:t>
-            </a:r>
-            <a:endParaRPr sz="1150">
+                <a:latin typeface="Calibri"/>
+                <a:ea typeface="Calibri"/>
+                <a:cs typeface="Calibri"/>
+                <a:sym typeface="Calibri"/>
+              </a:rPr>
+              <a:t>Total #votes: 814,693.    </a:t>
+            </a:r>
+            <a:endParaRPr sz="1100">
               <a:solidFill>
                 <a:srgbClr val="1F2937"/>
               </a:solidFill>
               <a:highlight>
                 <a:srgbClr val="FFFFFF"/>
               </a:highlight>
+              <a:latin typeface="Calibri"/>
+              <a:ea typeface="Calibri"/>
+              <a:cs typeface="Calibri"/>
+              <a:sym typeface="Calibri"/>
             </a:endParaRPr>
           </a:p>
           <a:p>
@@ -19317,17 +19594,21 @@
               <a:buNone/>
             </a:pPr>
             <a:r>
-              <a:rPr lang="en" sz="1150">
+              <a:rPr lang="en" sz="1100">
                 <a:solidFill>
                   <a:srgbClr val="1F2937"/>
                 </a:solidFill>
                 <a:highlight>
                   <a:srgbClr val="FFFFFF"/>
                 </a:highlight>
-              </a:rPr>
-              <a:t>Last updated: April 22, 2024</a:t>
-            </a:r>
-            <a:endParaRPr sz="1300" b="1">
+                <a:latin typeface="Calibri"/>
+                <a:ea typeface="Calibri"/>
+                <a:cs typeface="Calibri"/>
+                <a:sym typeface="Calibri"/>
+              </a:rPr>
+              <a:t>Last updated: April 26, 2024.</a:t>
+            </a:r>
+            <a:endParaRPr sz="1100" b="1">
               <a:solidFill>
                 <a:srgbClr val="FF0000"/>
               </a:solidFill>
@@ -19341,7 +19622,7 @@
       </p:sp>
       <p:sp>
         <p:nvSpPr>
-          <p:cNvPr id="87" name="Google Shape;87;p17"/>
+          <p:cNvPr id="91" name="Google Shape;91;p17"/>
           <p:cNvSpPr txBox="1"/>
           <p:nvPr/>
         </p:nvSpPr>
@@ -19455,7 +19736,7 @@
       </p:sp>
       <p:sp>
         <p:nvSpPr>
-          <p:cNvPr id="88" name="Google Shape;88;p17"/>
+          <p:cNvPr id="92" name="Google Shape;92;p17"/>
           <p:cNvSpPr txBox="1"/>
           <p:nvPr/>
         </p:nvSpPr>
@@ -19521,7 +19802,7 @@
       </p:sp>
       <p:sp>
         <p:nvSpPr>
-          <p:cNvPr id="89" name="Google Shape;89;p17"/>
+          <p:cNvPr id="93" name="Google Shape;93;p17"/>
           <p:cNvSpPr txBox="1"/>
           <p:nvPr/>
         </p:nvSpPr>
@@ -19570,7 +19851,7 @@
                 <a:ea typeface="Calibri"/>
                 <a:cs typeface="Calibri"/>
                 <a:sym typeface="Calibri"/>
-                <a:hlinkClick r:id="rId3"/>
+                <a:hlinkClick r:id="rId6"/>
               </a:rPr>
               <a:t>https://chat.lmsys.org/?leaderboard</a:t>
             </a:r>
@@ -19610,107 +19891,9 @@
           </a:p>
         </p:txBody>
       </p:sp>
-      <p:pic>
-        <p:nvPicPr>
-          <p:cNvPr id="90" name="Google Shape;90;p17"/>
-          <p:cNvPicPr preferRelativeResize="0"/>
-          <p:nvPr/>
-        </p:nvPicPr>
-        <p:blipFill>
-          <a:blip r:embed="rId4" cstate="email">
-            <a:alphaModFix/>
-            <a:extLst>
-              <a:ext uri="{28A0092B-C50C-407E-A947-70E740481C1C}">
-                <a14:useLocalDpi xmlns:a14="http://schemas.microsoft.com/office/drawing/2010/main"/>
-              </a:ext>
-            </a:extLst>
-          </a:blip>
-          <a:stretch>
-            <a:fillRect/>
-          </a:stretch>
-        </p:blipFill>
-        <p:spPr>
-          <a:xfrm>
-            <a:off x="70050" y="440250"/>
-            <a:ext cx="3865376" cy="2424899"/>
-          </a:xfrm>
-          <a:prstGeom prst="rect">
-            <a:avLst/>
-          </a:prstGeom>
-          <a:noFill/>
-          <a:ln>
-            <a:noFill/>
-          </a:ln>
-        </p:spPr>
-      </p:pic>
-      <p:pic>
-        <p:nvPicPr>
-          <p:cNvPr id="91" name="Google Shape;91;p17"/>
-          <p:cNvPicPr preferRelativeResize="0"/>
-          <p:nvPr/>
-        </p:nvPicPr>
-        <p:blipFill rotWithShape="1">
-          <a:blip r:embed="rId5" cstate="email">
-            <a:alphaModFix/>
-            <a:extLst>
-              <a:ext uri="{28A0092B-C50C-407E-A947-70E740481C1C}">
-                <a14:useLocalDpi xmlns:a14="http://schemas.microsoft.com/office/drawing/2010/main"/>
-              </a:ext>
-            </a:extLst>
-          </a:blip>
-          <a:srcRect/>
-          <a:stretch/>
-        </p:blipFill>
-        <p:spPr>
-          <a:xfrm>
-            <a:off x="70050" y="2875100"/>
-            <a:ext cx="3865376" cy="2123663"/>
-          </a:xfrm>
-          <a:prstGeom prst="rect">
-            <a:avLst/>
-          </a:prstGeom>
-          <a:noFill/>
-          <a:ln>
-            <a:noFill/>
-          </a:ln>
-        </p:spPr>
-      </p:pic>
-      <p:pic>
-        <p:nvPicPr>
-          <p:cNvPr id="92" name="Google Shape;92;p17"/>
-          <p:cNvPicPr preferRelativeResize="0"/>
-          <p:nvPr/>
-        </p:nvPicPr>
-        <p:blipFill>
-          <a:blip r:embed="rId6" cstate="email">
-            <a:alphaModFix/>
-            <a:extLst>
-              <a:ext uri="{28A0092B-C50C-407E-A947-70E740481C1C}">
-                <a14:useLocalDpi xmlns:a14="http://schemas.microsoft.com/office/drawing/2010/main"/>
-              </a:ext>
-            </a:extLst>
-          </a:blip>
-          <a:stretch>
-            <a:fillRect/>
-          </a:stretch>
-        </p:blipFill>
-        <p:spPr>
-          <a:xfrm>
-            <a:off x="4499675" y="805450"/>
-            <a:ext cx="3865376" cy="2373789"/>
-          </a:xfrm>
-          <a:prstGeom prst="rect">
-            <a:avLst/>
-          </a:prstGeom>
-          <a:noFill/>
-          <a:ln>
-            <a:noFill/>
-          </a:ln>
-        </p:spPr>
-      </p:pic>
       <p:sp>
         <p:nvSpPr>
-          <p:cNvPr id="93" name="Google Shape;93;p17"/>
+          <p:cNvPr id="94" name="Google Shape;94;p17"/>
           <p:cNvSpPr txBox="1"/>
           <p:nvPr/>
         </p:nvSpPr>
@@ -19944,7 +20127,7 @@
       </p:sp>
       <p:sp>
         <p:nvSpPr>
-          <p:cNvPr id="94" name="Google Shape;94;p17"/>
+          <p:cNvPr id="95" name="Google Shape;95;p17"/>
           <p:cNvSpPr/>
           <p:nvPr/>
         </p:nvSpPr>
@@ -19990,7 +20173,7 @@
       </p:sp>
       <p:sp>
         <p:nvSpPr>
-          <p:cNvPr id="95" name="Google Shape;95;p17"/>
+          <p:cNvPr id="96" name="Google Shape;96;p17"/>
           <p:cNvSpPr/>
           <p:nvPr/>
         </p:nvSpPr>
@@ -20036,13 +20219,13 @@
       </p:sp>
       <p:sp>
         <p:nvSpPr>
-          <p:cNvPr id="96" name="Google Shape;96;p17"/>
+          <p:cNvPr id="97" name="Google Shape;97;p17"/>
           <p:cNvSpPr/>
           <p:nvPr/>
         </p:nvSpPr>
         <p:spPr>
           <a:xfrm>
-            <a:off x="611700" y="3180002"/>
+            <a:off x="611700" y="2999401"/>
             <a:ext cx="125400" cy="125400"/>
           </a:xfrm>
           <a:prstGeom prst="ellipse">
@@ -20082,13 +20265,13 @@
       </p:sp>
       <p:sp>
         <p:nvSpPr>
-          <p:cNvPr id="97" name="Google Shape;97;p17"/>
+          <p:cNvPr id="98" name="Google Shape;98;p17"/>
           <p:cNvSpPr/>
           <p:nvPr/>
         </p:nvSpPr>
         <p:spPr>
           <a:xfrm>
-            <a:off x="611700" y="3942002"/>
+            <a:off x="611700" y="3898657"/>
             <a:ext cx="125400" cy="125400"/>
           </a:xfrm>
           <a:prstGeom prst="ellipse">
@@ -20128,13 +20311,13 @@
       </p:sp>
       <p:sp>
         <p:nvSpPr>
-          <p:cNvPr id="98" name="Google Shape;98;p17"/>
+          <p:cNvPr id="99" name="Google Shape;99;p17"/>
           <p:cNvSpPr/>
           <p:nvPr/>
         </p:nvSpPr>
         <p:spPr>
           <a:xfrm>
-            <a:off x="611700" y="2890886"/>
+            <a:off x="611700" y="2861990"/>
             <a:ext cx="125400" cy="125400"/>
           </a:xfrm>
           <a:prstGeom prst="ellipse">
@@ -20174,13 +20357,13 @@
       </p:sp>
       <p:sp>
         <p:nvSpPr>
-          <p:cNvPr id="99" name="Google Shape;99;p17"/>
+          <p:cNvPr id="100" name="Google Shape;100;p17"/>
           <p:cNvSpPr/>
           <p:nvPr/>
         </p:nvSpPr>
         <p:spPr>
           <a:xfrm>
-            <a:off x="611700" y="4377897"/>
+            <a:off x="611700" y="4471809"/>
             <a:ext cx="125400" cy="125400"/>
           </a:xfrm>
           <a:prstGeom prst="ellipse">
@@ -20220,7 +20403,7 @@
       </p:sp>
       <p:sp>
         <p:nvSpPr>
-          <p:cNvPr id="100" name="Google Shape;100;p17"/>
+          <p:cNvPr id="101" name="Google Shape;101;p17"/>
           <p:cNvSpPr/>
           <p:nvPr/>
         </p:nvSpPr>
@@ -20266,13 +20449,13 @@
       </p:sp>
       <p:sp>
         <p:nvSpPr>
-          <p:cNvPr id="101" name="Google Shape;101;p17"/>
+          <p:cNvPr id="102" name="Google Shape;102;p17"/>
           <p:cNvSpPr/>
           <p:nvPr/>
         </p:nvSpPr>
         <p:spPr>
           <a:xfrm>
-            <a:off x="5031300" y="917528"/>
+            <a:off x="5031300" y="1069233"/>
             <a:ext cx="125400" cy="125400"/>
           </a:xfrm>
           <a:prstGeom prst="ellipse">
@@ -20312,7 +20495,7 @@
       </p:sp>
       <p:sp>
         <p:nvSpPr>
-          <p:cNvPr id="102" name="Google Shape;102;p17"/>
+          <p:cNvPr id="103" name="Google Shape;103;p17"/>
           <p:cNvSpPr/>
           <p:nvPr/>
         </p:nvSpPr>
@@ -20358,13 +20541,13 @@
       </p:sp>
       <p:sp>
         <p:nvSpPr>
-          <p:cNvPr id="103" name="Google Shape;103;p17"/>
+          <p:cNvPr id="104" name="Google Shape;104;p17"/>
           <p:cNvSpPr/>
           <p:nvPr/>
         </p:nvSpPr>
         <p:spPr>
           <a:xfrm>
-            <a:off x="5031300" y="1490139"/>
+            <a:off x="5031300" y="1396227"/>
             <a:ext cx="125400" cy="125400"/>
           </a:xfrm>
           <a:prstGeom prst="ellipse">
@@ -20404,13 +20587,13 @@
       </p:sp>
       <p:sp>
         <p:nvSpPr>
-          <p:cNvPr id="104" name="Google Shape;104;p17"/>
+          <p:cNvPr id="105" name="Google Shape;105;p17"/>
           <p:cNvSpPr/>
           <p:nvPr/>
         </p:nvSpPr>
         <p:spPr>
           <a:xfrm>
-            <a:off x="5031300" y="2556939"/>
+            <a:off x="5031300" y="2520819"/>
             <a:ext cx="125400" cy="125400"/>
           </a:xfrm>
           <a:prstGeom prst="ellipse">
@@ -20450,13 +20633,13 @@
       </p:sp>
       <p:sp>
         <p:nvSpPr>
-          <p:cNvPr id="105" name="Google Shape;105;p17"/>
+          <p:cNvPr id="106" name="Google Shape;106;p17"/>
           <p:cNvSpPr/>
           <p:nvPr/>
         </p:nvSpPr>
         <p:spPr>
           <a:xfrm>
-            <a:off x="5031300" y="2709339"/>
+            <a:off x="5031300" y="2673219"/>
             <a:ext cx="125400" cy="125400"/>
           </a:xfrm>
           <a:prstGeom prst="ellipse">
@@ -20507,7 +20690,7 @@
   <p:cSld>
     <p:spTree>
       <p:nvGrpSpPr>
-        <p:cNvPr id="1" name="Shape 109"/>
+        <p:cNvPr id="1" name="Shape 110"/>
         <p:cNvGrpSpPr/>
         <p:nvPr/>
       </p:nvGrpSpPr>
@@ -20521,7 +20704,7 @@
       </p:grpSpPr>
       <p:sp>
         <p:nvSpPr>
-          <p:cNvPr id="110" name="Google Shape;110;p18"/>
+          <p:cNvPr id="111" name="Google Shape;111;p18"/>
           <p:cNvSpPr txBox="1"/>
           <p:nvPr/>
         </p:nvSpPr>
@@ -21134,7 +21317,7 @@
       </p:sp>
       <p:sp>
         <p:nvSpPr>
-          <p:cNvPr id="111" name="Google Shape;111;p18"/>
+          <p:cNvPr id="112" name="Google Shape;112;p18"/>
           <p:cNvSpPr txBox="1"/>
           <p:nvPr/>
         </p:nvSpPr>
@@ -21192,7 +21375,7 @@
       </p:sp>
       <p:pic>
         <p:nvPicPr>
-          <p:cNvPr id="112" name="Google Shape;112;p18"/>
+          <p:cNvPr id="113" name="Google Shape;113;p18"/>
           <p:cNvPicPr preferRelativeResize="0"/>
           <p:nvPr/>
         </p:nvPicPr>
@@ -21211,15 +21394,60 @@
         </p:blipFill>
         <p:spPr>
           <a:xfrm>
-            <a:off x="4622400" y="1077775"/>
+            <a:off x="4676875" y="112900"/>
             <a:ext cx="4369201" cy="1807601"/>
           </a:xfrm>
           <a:prstGeom prst="rect">
             <a:avLst/>
           </a:prstGeom>
           <a:noFill/>
-          <a:ln>
-            <a:noFill/>
+          <a:ln w="9525" cap="flat" cmpd="sng">
+            <a:solidFill>
+              <a:srgbClr val="FF0000"/>
+            </a:solidFill>
+            <a:prstDash val="solid"/>
+            <a:round/>
+            <a:headEnd type="none" w="sm" len="sm"/>
+            <a:tailEnd type="none" w="sm" len="sm"/>
+          </a:ln>
+        </p:spPr>
+      </p:pic>
+      <p:pic>
+        <p:nvPicPr>
+          <p:cNvPr id="114" name="Google Shape;114;p18"/>
+          <p:cNvPicPr preferRelativeResize="0"/>
+          <p:nvPr/>
+        </p:nvPicPr>
+        <p:blipFill>
+          <a:blip r:embed="rId5" cstate="email">
+            <a:alphaModFix/>
+            <a:extLst>
+              <a:ext uri="{28A0092B-C50C-407E-A947-70E740481C1C}">
+                <a14:useLocalDpi xmlns:a14="http://schemas.microsoft.com/office/drawing/2010/main"/>
+              </a:ext>
+            </a:extLst>
+          </a:blip>
+          <a:stretch>
+            <a:fillRect/>
+          </a:stretch>
+        </p:blipFill>
+        <p:spPr>
+          <a:xfrm>
+            <a:off x="4676875" y="2026801"/>
+            <a:ext cx="4369200" cy="2461316"/>
+          </a:xfrm>
+          <a:prstGeom prst="rect">
+            <a:avLst/>
+          </a:prstGeom>
+          <a:noFill/>
+          <a:ln w="9525" cap="flat" cmpd="sng">
+            <a:solidFill>
+              <a:srgbClr val="FF0000"/>
+            </a:solidFill>
+            <a:prstDash val="solid"/>
+            <a:round/>
+            <a:headEnd type="none" w="sm" len="sm"/>
+            <a:tailEnd type="none" w="sm" len="sm"/>
           </a:ln>
         </p:spPr>
       </p:pic>
@@ -21236,7 +21464,7 @@
   <p:cSld>
     <p:spTree>
       <p:nvGrpSpPr>
-        <p:cNvPr id="1" name="Shape 116"/>
+        <p:cNvPr id="1" name="Shape 118"/>
         <p:cNvGrpSpPr/>
         <p:nvPr/>
       </p:nvGrpSpPr>
@@ -21250,7 +21478,7 @@
       </p:grpSpPr>
       <p:sp>
         <p:nvSpPr>
-          <p:cNvPr id="117" name="Google Shape;117;p19"/>
+          <p:cNvPr id="119" name="Google Shape;119;p19"/>
           <p:cNvSpPr txBox="1"/>
           <p:nvPr/>
         </p:nvSpPr>
@@ -21308,7 +21536,7 @@
       </p:sp>
       <p:sp>
         <p:nvSpPr>
-          <p:cNvPr id="118" name="Google Shape;118;p19"/>
+          <p:cNvPr id="120" name="Google Shape;120;p19"/>
           <p:cNvSpPr txBox="1"/>
           <p:nvPr/>
         </p:nvSpPr>
@@ -21639,7 +21867,7 @@
       </p:sp>
       <p:pic>
         <p:nvPicPr>
-          <p:cNvPr id="119" name="Google Shape;119;p19"/>
+          <p:cNvPr id="121" name="Google Shape;121;p19"/>
           <p:cNvPicPr preferRelativeResize="0"/>
           <p:nvPr/>
         </p:nvPicPr>
@@ -21678,7 +21906,7 @@
       </p:pic>
       <p:pic>
         <p:nvPicPr>
-          <p:cNvPr id="120" name="Google Shape;120;p19"/>
+          <p:cNvPr id="122" name="Google Shape;122;p19"/>
           <p:cNvPicPr preferRelativeResize="0"/>
           <p:nvPr/>
         </p:nvPicPr>
@@ -21721,7 +21949,7 @@
   <p:cSld>
     <p:spTree>
       <p:nvGrpSpPr>
-        <p:cNvPr id="1" name="Shape 124"/>
+        <p:cNvPr id="1" name="Shape 126"/>
         <p:cNvGrpSpPr/>
         <p:nvPr/>
       </p:nvGrpSpPr>
@@ -21735,7 +21963,7 @@
       </p:grpSpPr>
       <p:sp>
         <p:nvSpPr>
-          <p:cNvPr id="125" name="Google Shape;125;p20"/>
+          <p:cNvPr id="127" name="Google Shape;127;p20"/>
           <p:cNvSpPr txBox="1"/>
           <p:nvPr/>
         </p:nvSpPr>
@@ -21795,7 +22023,7 @@
       </p:sp>
       <p:sp>
         <p:nvSpPr>
-          <p:cNvPr id="126" name="Google Shape;126;p20"/>
+          <p:cNvPr id="128" name="Google Shape;128;p20"/>
           <p:cNvSpPr txBox="1"/>
           <p:nvPr/>
         </p:nvSpPr>
@@ -21958,7 +22186,7 @@
       </p:sp>
       <p:pic>
         <p:nvPicPr>
-          <p:cNvPr id="127" name="Google Shape;127;p20"/>
+          <p:cNvPr id="129" name="Google Shape;129;p20"/>
           <p:cNvPicPr preferRelativeResize="0"/>
           <p:nvPr/>
         </p:nvPicPr>
@@ -21991,7 +22219,7 @@
       </p:pic>
       <p:pic>
         <p:nvPicPr>
-          <p:cNvPr id="128" name="Google Shape;128;p20"/>
+          <p:cNvPr id="130" name="Google Shape;130;p20"/>
           <p:cNvPicPr preferRelativeResize="0"/>
           <p:nvPr/>
         </p:nvPicPr>
@@ -22030,7 +22258,7 @@
       </p:pic>
       <p:sp>
         <p:nvSpPr>
-          <p:cNvPr id="129" name="Google Shape;129;p20"/>
+          <p:cNvPr id="131" name="Google Shape;131;p20"/>
           <p:cNvSpPr txBox="1"/>
           <p:nvPr/>
         </p:nvSpPr>
@@ -22102,7 +22330,7 @@
       </p:sp>
       <p:pic>
         <p:nvPicPr>
-          <p:cNvPr id="130" name="Google Shape;130;p20"/>
+          <p:cNvPr id="132" name="Google Shape;132;p20"/>
           <p:cNvPicPr preferRelativeResize="0"/>
           <p:nvPr/>
         </p:nvPicPr>
@@ -22145,7 +22373,7 @@
   <p:cSld>
     <p:spTree>
       <p:nvGrpSpPr>
-        <p:cNvPr id="1" name="Shape 134"/>
+        <p:cNvPr id="1" name="Shape 136"/>
         <p:cNvGrpSpPr/>
         <p:nvPr/>
       </p:nvGrpSpPr>
@@ -22159,7 +22387,7 @@
       </p:grpSpPr>
       <p:sp>
         <p:nvSpPr>
-          <p:cNvPr id="135" name="Google Shape;135;p21"/>
+          <p:cNvPr id="137" name="Google Shape;137;p21"/>
           <p:cNvSpPr txBox="1"/>
           <p:nvPr/>
         </p:nvSpPr>
@@ -22217,7 +22445,7 @@
       </p:sp>
       <p:sp>
         <p:nvSpPr>
-          <p:cNvPr id="136" name="Google Shape;136;p21"/>
+          <p:cNvPr id="138" name="Google Shape;138;p21"/>
           <p:cNvSpPr txBox="1"/>
           <p:nvPr/>
         </p:nvSpPr>
@@ -22618,7 +22846,7 @@
       </p:sp>
       <p:pic>
         <p:nvPicPr>
-          <p:cNvPr id="137" name="Google Shape;137;p21"/>
+          <p:cNvPr id="139" name="Google Shape;139;p21"/>
           <p:cNvPicPr preferRelativeResize="0"/>
           <p:nvPr/>
         </p:nvPicPr>
@@ -22662,7 +22890,7 @@
   <p:cSld>
     <p:spTree>
       <p:nvGrpSpPr>
-        <p:cNvPr id="1" name="Shape 141"/>
+        <p:cNvPr id="1" name="Shape 143"/>
         <p:cNvGrpSpPr/>
         <p:nvPr/>
       </p:nvGrpSpPr>
@@ -22676,7 +22904,7 @@
       </p:grpSpPr>
       <p:sp>
         <p:nvSpPr>
-          <p:cNvPr id="142" name="Google Shape;142;p22"/>
+          <p:cNvPr id="144" name="Google Shape;144;p22"/>
           <p:cNvSpPr txBox="1"/>
           <p:nvPr/>
         </p:nvSpPr>
@@ -22734,7 +22962,7 @@
       </p:sp>
       <p:sp>
         <p:nvSpPr>
-          <p:cNvPr id="143" name="Google Shape;143;p22"/>
+          <p:cNvPr id="145" name="Google Shape;145;p22"/>
           <p:cNvSpPr txBox="1"/>
           <p:nvPr/>
         </p:nvSpPr>
@@ -23038,7 +23266,7 @@
       </p:sp>
       <p:pic>
         <p:nvPicPr>
-          <p:cNvPr id="144" name="Google Shape;144;p22"/>
+          <p:cNvPr id="146" name="Google Shape;146;p22"/>
           <p:cNvPicPr preferRelativeResize="0"/>
           <p:nvPr/>
         </p:nvPicPr>
@@ -23071,7 +23299,7 @@
       </p:pic>
       <p:pic>
         <p:nvPicPr>
-          <p:cNvPr id="145" name="Google Shape;145;p22"/>
+          <p:cNvPr id="147" name="Google Shape;147;p22"/>
           <p:cNvPicPr preferRelativeResize="0"/>
           <p:nvPr/>
         </p:nvPicPr>
@@ -23104,7 +23332,7 @@
       </p:pic>
       <p:pic>
         <p:nvPicPr>
-          <p:cNvPr id="146" name="Google Shape;146;p22"/>
+          <p:cNvPr id="148" name="Google Shape;148;p22"/>
           <p:cNvPicPr preferRelativeResize="0"/>
           <p:nvPr/>
         </p:nvPicPr>
